--- a/public/lessons/year-6-maths/summer/week-21/substitute-into-formulae/teaching-powerpoint-v1.pptx
+++ b/public/lessons/year-6-maths/summer/week-21/substitute-into-formulae/teaching-powerpoint-v1.pptx
@@ -2,24 +2,24 @@
 <file path=ppt/presentation.xml><?xml version="1.0" encoding="utf-8"?>
 <p:presentation xmlns:p="http://schemas.openxmlformats.org/presentationml/2006/main">
   <p:sldMasterIdLst>
-    <p:sldMasterId xmlns:r="http://schemas.openxmlformats.org/officeDocument/2006/relationships" id="2147483648" r:id="R883f7006f4454732"/>
+    <p:sldMasterId xmlns:r="http://schemas.openxmlformats.org/officeDocument/2006/relationships" id="2147483648" r:id="R04cc92d7b6ea45f8"/>
   </p:sldMasterIdLst>
   <p:notesMasterIdLst>
-    <p:notesMasterId xmlns:r="http://schemas.openxmlformats.org/officeDocument/2006/relationships" r:id="R29007657b5b949e3"/>
+    <p:notesMasterId xmlns:r="http://schemas.openxmlformats.org/officeDocument/2006/relationships" r:id="R302e25aa907e45a4"/>
   </p:notesMasterIdLst>
   <p:sldIdLst>
-    <p:sldId xmlns:r="http://schemas.openxmlformats.org/officeDocument/2006/relationships" id="256" r:id="Reae7cc71a65c4a0e"/>
-    <p:sldId xmlns:r="http://schemas.openxmlformats.org/officeDocument/2006/relationships" id="257" r:id="R8bdd50f5d4904fc1"/>
-    <p:sldId xmlns:r="http://schemas.openxmlformats.org/officeDocument/2006/relationships" id="258" r:id="Rf6caabcdd27e4576"/>
-    <p:sldId xmlns:r="http://schemas.openxmlformats.org/officeDocument/2006/relationships" id="259" r:id="R42e5a0ff903b4f5a"/>
-    <p:sldId xmlns:r="http://schemas.openxmlformats.org/officeDocument/2006/relationships" id="260" r:id="Rdc344aa69f0a4809"/>
-    <p:sldId xmlns:r="http://schemas.openxmlformats.org/officeDocument/2006/relationships" id="261" r:id="R63d1f1e50ff941c6"/>
-    <p:sldId xmlns:r="http://schemas.openxmlformats.org/officeDocument/2006/relationships" id="262" r:id="R77f7cfcbffb64635"/>
-    <p:sldId xmlns:r="http://schemas.openxmlformats.org/officeDocument/2006/relationships" id="263" r:id="R523ba1412f9b489e"/>
-    <p:sldId xmlns:r="http://schemas.openxmlformats.org/officeDocument/2006/relationships" id="264" r:id="Ra77a8b6844414d2a"/>
-    <p:sldId xmlns:r="http://schemas.openxmlformats.org/officeDocument/2006/relationships" id="265" r:id="R2ae837ad33ec42cb"/>
-    <p:sldId xmlns:r="http://schemas.openxmlformats.org/officeDocument/2006/relationships" id="266" r:id="R35915c347ee34391"/>
-    <p:sldId xmlns:r="http://schemas.openxmlformats.org/officeDocument/2006/relationships" id="267" r:id="R47e53e8473e841ce"/>
+    <p:sldId xmlns:r="http://schemas.openxmlformats.org/officeDocument/2006/relationships" id="256" r:id="R73abdcabd78a48c4"/>
+    <p:sldId xmlns:r="http://schemas.openxmlformats.org/officeDocument/2006/relationships" id="257" r:id="R64e7dcd8488e4e1f"/>
+    <p:sldId xmlns:r="http://schemas.openxmlformats.org/officeDocument/2006/relationships" id="258" r:id="R167ddd185d9d4b79"/>
+    <p:sldId xmlns:r="http://schemas.openxmlformats.org/officeDocument/2006/relationships" id="259" r:id="Rb12e12a388784a61"/>
+    <p:sldId xmlns:r="http://schemas.openxmlformats.org/officeDocument/2006/relationships" id="260" r:id="R1e835ec25ac84a94"/>
+    <p:sldId xmlns:r="http://schemas.openxmlformats.org/officeDocument/2006/relationships" id="261" r:id="Rb4b6244144644a5e"/>
+    <p:sldId xmlns:r="http://schemas.openxmlformats.org/officeDocument/2006/relationships" id="262" r:id="Rdee52ec218d74200"/>
+    <p:sldId xmlns:r="http://schemas.openxmlformats.org/officeDocument/2006/relationships" id="263" r:id="Raa345715d422447d"/>
+    <p:sldId xmlns:r="http://schemas.openxmlformats.org/officeDocument/2006/relationships" id="264" r:id="Rc5b8a35120cb45cd"/>
+    <p:sldId xmlns:r="http://schemas.openxmlformats.org/officeDocument/2006/relationships" id="265" r:id="R5f495256a1c246b8"/>
+    <p:sldId xmlns:r="http://schemas.openxmlformats.org/officeDocument/2006/relationships" id="266" r:id="Rf6020789ba2f44c9"/>
+    <p:sldId xmlns:r="http://schemas.openxmlformats.org/officeDocument/2006/relationships" id="267" r:id="R7fbdbb98dc4d4891"/>
   </p:sldIdLst>
   <p:sldSz cx="12192000" cy="6858000"/>
   <p:notesSz cx="6858000" cy="9144000"/>
@@ -873,7 +873,7 @@
           <a:lstStyle xmlns:a="http://schemas.openxmlformats.org/drawingml/2006/main"/>
           <a:p xmlns:a="http://schemas.openxmlformats.org/drawingml/2006/main">
             <a:r>
-              <a:t>I do. Reveal the question, setup and each calculation stage one click at a time. Pupils watch before copying. Model answer: 31.</a:t>
+              <a:t>I do. Reveal the question, then reveal each mathematical change one click at a time. Point to the numbers and operation that changed before moving to the next line. Final answer: 31.</a:t>
             </a:r>
           </a:p>
         </p:txBody>
@@ -1291,7 +1291,7 @@
   </p:cSld>
   <p:clrMap bg1="lt1" tx1="dk1" bg2="lt2" tx2="dk2" accent1="accent1" accent2="accent2" accent3="accent3" accent4="accent4" accent5="accent5" accent6="accent6" hlink="hlink" folHlink="folHlink"/>
   <p:sldLayoutIdLst>
-    <p:sldLayoutId xmlns:r="http://schemas.openxmlformats.org/officeDocument/2006/relationships" id="2147483649" r:id="R5780b714f1e340d3"/>
+    <p:sldLayoutId xmlns:r="http://schemas.openxmlformats.org/officeDocument/2006/relationships" id="2147483649" r:id="R82b5a7dc027f45a3"/>
   </p:sldLayoutIdLst>
   <p:txStyles>
     <p:titleStyle>
@@ -1842,7 +1842,7 @@
           <p:cNvPr id="12" name="">
             <a:extLst xmlns:a="http://schemas.openxmlformats.org/drawingml/2006/main">
               <a:ext uri="{FF2B5EF4-FFF2-40B4-BE49-F238E27FC236}">
-                <a16:creationId xmlns:a16="http://schemas.microsoft.com/office/drawing/2014/main" id="{699525FF-6FEE-446D-9C38-06DAB8557F04}"/>
+                <a16:creationId xmlns:a16="http://schemas.microsoft.com/office/drawing/2014/main" id="{54F2AB7B-6954-44F4-86B9-9FD61294FCCD}"/>
               </a:ext>
             </a:extLst>
           </p:cNvPr>
@@ -1874,7 +1874,7 @@
           <p:cNvPr id="2" name="">
             <a:extLst xmlns:a="http://schemas.openxmlformats.org/drawingml/2006/main">
               <a:ext uri="{FF2B5EF4-FFF2-40B4-BE49-F238E27FC236}">
-                <a16:creationId xmlns:a16="http://schemas.microsoft.com/office/drawing/2014/main" id="{2FBA596D-BA19-43A3-863E-9778A5E41420}"/>
+                <a16:creationId xmlns:a16="http://schemas.microsoft.com/office/drawing/2014/main" id="{DF1BA2F8-CFF7-482B-A147-5F3491D4F494}"/>
               </a:ext>
             </a:extLst>
           </p:cNvPr>
@@ -1931,7 +1931,7 @@
           <p:cNvPr id="3" name="">
             <a:extLst xmlns:a="http://schemas.openxmlformats.org/drawingml/2006/main">
               <a:ext uri="{FF2B5EF4-FFF2-40B4-BE49-F238E27FC236}">
-                <a16:creationId xmlns:a16="http://schemas.microsoft.com/office/drawing/2014/main" id="{F6FD7AAD-9A16-48A1-9AC7-402A008B2AB4}"/>
+                <a16:creationId xmlns:a16="http://schemas.microsoft.com/office/drawing/2014/main" id="{09DF0F7D-0FB2-49C8-8D81-47D3860AAB3D}"/>
               </a:ext>
             </a:extLst>
           </p:cNvPr>
@@ -1965,7 +1965,7 @@
           <p:cNvPr id="4" name="">
             <a:extLst xmlns:a="http://schemas.openxmlformats.org/drawingml/2006/main">
               <a:ext uri="{FF2B5EF4-FFF2-40B4-BE49-F238E27FC236}">
-                <a16:creationId xmlns:a16="http://schemas.microsoft.com/office/drawing/2014/main" id="{201B82ED-1CCA-4642-9DFD-8BD0B5FA425B}"/>
+                <a16:creationId xmlns:a16="http://schemas.microsoft.com/office/drawing/2014/main" id="{DA4ACEBE-1A26-472D-8DA9-5A78B632688D}"/>
               </a:ext>
             </a:extLst>
           </p:cNvPr>
@@ -2022,7 +2022,7 @@
           <p:cNvPr id="5" name="">
             <a:extLst xmlns:a="http://schemas.openxmlformats.org/drawingml/2006/main">
               <a:ext uri="{FF2B5EF4-FFF2-40B4-BE49-F238E27FC236}">
-                <a16:creationId xmlns:a16="http://schemas.microsoft.com/office/drawing/2014/main" id="{E4941914-8E24-4884-886C-1ADAE1CAFA10}"/>
+                <a16:creationId xmlns:a16="http://schemas.microsoft.com/office/drawing/2014/main" id="{596C4B71-BBF7-4E58-8D57-071242E9C82D}"/>
               </a:ext>
             </a:extLst>
           </p:cNvPr>
@@ -2079,7 +2079,7 @@
           <p:cNvPr id="6" name="">
             <a:extLst xmlns:a="http://schemas.openxmlformats.org/drawingml/2006/main">
               <a:ext uri="{FF2B5EF4-FFF2-40B4-BE49-F238E27FC236}">
-                <a16:creationId xmlns:a16="http://schemas.microsoft.com/office/drawing/2014/main" id="{F159D6E6-D2CF-4251-821A-C4D60FACE3A9}"/>
+                <a16:creationId xmlns:a16="http://schemas.microsoft.com/office/drawing/2014/main" id="{D6B1461E-E1AB-46A4-AAEC-6C36EFB0BECA}"/>
               </a:ext>
             </a:extLst>
           </p:cNvPr>
@@ -2113,7 +2113,7 @@
           <p:cNvPr id="7" name="">
             <a:extLst xmlns:a="http://schemas.openxmlformats.org/drawingml/2006/main">
               <a:ext uri="{FF2B5EF4-FFF2-40B4-BE49-F238E27FC236}">
-                <a16:creationId xmlns:a16="http://schemas.microsoft.com/office/drawing/2014/main" id="{82F92B84-A554-496D-B889-7A449591643D}"/>
+                <a16:creationId xmlns:a16="http://schemas.microsoft.com/office/drawing/2014/main" id="{A24C65A5-F1FD-4541-AA9C-22DE332D1CBB}"/>
               </a:ext>
             </a:extLst>
           </p:cNvPr>
@@ -2170,7 +2170,7 @@
           <p:cNvPr id="8" name="">
             <a:extLst xmlns:a="http://schemas.openxmlformats.org/drawingml/2006/main">
               <a:ext uri="{FF2B5EF4-FFF2-40B4-BE49-F238E27FC236}">
-                <a16:creationId xmlns:a16="http://schemas.microsoft.com/office/drawing/2014/main" id="{F5FF5495-82B3-4557-B4A5-81B79B895085}"/>
+                <a16:creationId xmlns:a16="http://schemas.microsoft.com/office/drawing/2014/main" id="{9F98E743-555D-4C73-8518-E745CE08CD0D}"/>
               </a:ext>
             </a:extLst>
           </p:cNvPr>
@@ -2227,7 +2227,7 @@
           <p:cNvPr id="9" name="">
             <a:extLst xmlns:a="http://schemas.openxmlformats.org/drawingml/2006/main">
               <a:ext uri="{FF2B5EF4-FFF2-40B4-BE49-F238E27FC236}">
-                <a16:creationId xmlns:a16="http://schemas.microsoft.com/office/drawing/2014/main" id="{37E2005D-86D4-434D-A472-2CCA9FB9E26C}"/>
+                <a16:creationId xmlns:a16="http://schemas.microsoft.com/office/drawing/2014/main" id="{FE863045-6BBD-4B71-8F59-20249921ACE1}"/>
               </a:ext>
             </a:extLst>
           </p:cNvPr>
@@ -2284,7 +2284,7 @@
           <p:cNvPr id="10" name="">
             <a:extLst xmlns:a="http://schemas.openxmlformats.org/drawingml/2006/main">
               <a:ext uri="{FF2B5EF4-FFF2-40B4-BE49-F238E27FC236}">
-                <a16:creationId xmlns:a16="http://schemas.microsoft.com/office/drawing/2014/main" id="{DD5F506E-6694-41B1-A664-9C7DD8567E37}"/>
+                <a16:creationId xmlns:a16="http://schemas.microsoft.com/office/drawing/2014/main" id="{6A81BF79-43FD-4FCA-B3E9-8585CB60499C}"/>
               </a:ext>
             </a:extLst>
           </p:cNvPr>
@@ -2341,7 +2341,7 @@
           <p:cNvPr id="11" name="">
             <a:extLst xmlns:a="http://schemas.openxmlformats.org/drawingml/2006/main">
               <a:ext uri="{FF2B5EF4-FFF2-40B4-BE49-F238E27FC236}">
-                <a16:creationId xmlns:a16="http://schemas.microsoft.com/office/drawing/2014/main" id="{8647D99F-5B3F-4649-AEDF-9ACAFF8331C8}"/>
+                <a16:creationId xmlns:a16="http://schemas.microsoft.com/office/drawing/2014/main" id="{BD56B12D-535B-4695-9B8F-A173F076A864}"/>
               </a:ext>
             </a:extLst>
           </p:cNvPr>
@@ -2396,7 +2396,7 @@
     </p:spTree>
     <p:extLst>
       <p:ext uri="{BB962C8B-B14F-4D97-AF65-F5344CB8AC3E}">
-        <p14:creationId xmlns:p14="http://schemas.microsoft.com/office/powerpoint/2010/main" val="2011626551"/>
+        <p14:creationId xmlns:p14="http://schemas.microsoft.com/office/powerpoint/2010/main" val="445021540"/>
       </p:ext>
     </p:extLst>
   </p:cSld>
@@ -2427,7 +2427,7 @@
           <p:cNvPr id="14" name="">
             <a:extLst xmlns:a="http://schemas.openxmlformats.org/drawingml/2006/main">
               <a:ext uri="{FF2B5EF4-FFF2-40B4-BE49-F238E27FC236}">
-                <a16:creationId xmlns:a16="http://schemas.microsoft.com/office/drawing/2014/main" id="{90049922-F60A-4FC7-8869-9D59A4F0259F}"/>
+                <a16:creationId xmlns:a16="http://schemas.microsoft.com/office/drawing/2014/main" id="{D8CE1BE0-0DEF-4462-ACD7-70101CBB601E}"/>
               </a:ext>
             </a:extLst>
           </p:cNvPr>
@@ -2459,7 +2459,7 @@
           <p:cNvPr id="2" name="">
             <a:extLst xmlns:a="http://schemas.openxmlformats.org/drawingml/2006/main">
               <a:ext uri="{FF2B5EF4-FFF2-40B4-BE49-F238E27FC236}">
-                <a16:creationId xmlns:a16="http://schemas.microsoft.com/office/drawing/2014/main" id="{851F7DBD-09F4-4B40-A0EA-9CA4604181C2}"/>
+                <a16:creationId xmlns:a16="http://schemas.microsoft.com/office/drawing/2014/main" id="{3B6822D5-1713-4EFE-B021-DA2D217AFE3F}"/>
               </a:ext>
             </a:extLst>
           </p:cNvPr>
@@ -2516,7 +2516,7 @@
           <p:cNvPr id="3" name="">
             <a:extLst xmlns:a="http://schemas.openxmlformats.org/drawingml/2006/main">
               <a:ext uri="{FF2B5EF4-FFF2-40B4-BE49-F238E27FC236}">
-                <a16:creationId xmlns:a16="http://schemas.microsoft.com/office/drawing/2014/main" id="{7A162F92-0EA1-48F5-BCCA-218CF3992857}"/>
+                <a16:creationId xmlns:a16="http://schemas.microsoft.com/office/drawing/2014/main" id="{70682F84-FA34-4F72-B538-90A14CF5E14A}"/>
               </a:ext>
             </a:extLst>
           </p:cNvPr>
@@ -2548,7 +2548,7 @@
           <p:cNvPr id="4" name="">
             <a:extLst xmlns:a="http://schemas.openxmlformats.org/drawingml/2006/main">
               <a:ext uri="{FF2B5EF4-FFF2-40B4-BE49-F238E27FC236}">
-                <a16:creationId xmlns:a16="http://schemas.microsoft.com/office/drawing/2014/main" id="{3A58114C-5B32-4D36-A20D-E89E58B91851}"/>
+                <a16:creationId xmlns:a16="http://schemas.microsoft.com/office/drawing/2014/main" id="{DED78A49-D117-435B-9C25-8510CB2F20A4}"/>
               </a:ext>
             </a:extLst>
           </p:cNvPr>
@@ -2605,7 +2605,7 @@
           <p:cNvPr id="5" name="">
             <a:extLst xmlns:a="http://schemas.openxmlformats.org/drawingml/2006/main">
               <a:ext uri="{FF2B5EF4-FFF2-40B4-BE49-F238E27FC236}">
-                <a16:creationId xmlns:a16="http://schemas.microsoft.com/office/drawing/2014/main" id="{A7E7EF63-5AD8-4A22-BFDE-1742358E50A5}"/>
+                <a16:creationId xmlns:a16="http://schemas.microsoft.com/office/drawing/2014/main" id="{7CB97F45-EE20-4769-8C00-F448BD83574D}"/>
               </a:ext>
             </a:extLst>
           </p:cNvPr>
@@ -2662,7 +2662,7 @@
           <p:cNvPr id="6" name="">
             <a:extLst xmlns:a="http://schemas.openxmlformats.org/drawingml/2006/main">
               <a:ext uri="{FF2B5EF4-FFF2-40B4-BE49-F238E27FC236}">
-                <a16:creationId xmlns:a16="http://schemas.microsoft.com/office/drawing/2014/main" id="{DC1DE7DE-47E9-4E05-8408-869EE52E479D}"/>
+                <a16:creationId xmlns:a16="http://schemas.microsoft.com/office/drawing/2014/main" id="{B0A6B09B-0D6E-46AC-899A-B6A0D2F51185}"/>
               </a:ext>
             </a:extLst>
           </p:cNvPr>
@@ -2719,7 +2719,7 @@
           <p:cNvPr id="7" name="">
             <a:extLst xmlns:a="http://schemas.openxmlformats.org/drawingml/2006/main">
               <a:ext uri="{FF2B5EF4-FFF2-40B4-BE49-F238E27FC236}">
-                <a16:creationId xmlns:a16="http://schemas.microsoft.com/office/drawing/2014/main" id="{24D408B0-256E-490C-B710-943A1903956A}"/>
+                <a16:creationId xmlns:a16="http://schemas.microsoft.com/office/drawing/2014/main" id="{B888B0E6-A438-41A1-8DE6-A0A02AD6955E}"/>
               </a:ext>
             </a:extLst>
           </p:cNvPr>
@@ -2751,7 +2751,7 @@
           <p:cNvPr id="8" name="">
             <a:extLst xmlns:a="http://schemas.openxmlformats.org/drawingml/2006/main">
               <a:ext uri="{FF2B5EF4-FFF2-40B4-BE49-F238E27FC236}">
-                <a16:creationId xmlns:a16="http://schemas.microsoft.com/office/drawing/2014/main" id="{D1F2DFEC-2C06-450D-8E02-EC81D5365DAD}"/>
+                <a16:creationId xmlns:a16="http://schemas.microsoft.com/office/drawing/2014/main" id="{1A4DC243-DD83-4539-AC80-38F93E4BF03D}"/>
               </a:ext>
             </a:extLst>
           </p:cNvPr>
@@ -2808,7 +2808,7 @@
           <p:cNvPr id="9" name="">
             <a:extLst xmlns:a="http://schemas.openxmlformats.org/drawingml/2006/main">
               <a:ext uri="{FF2B5EF4-FFF2-40B4-BE49-F238E27FC236}">
-                <a16:creationId xmlns:a16="http://schemas.microsoft.com/office/drawing/2014/main" id="{0CECC570-AEEA-4496-8F5E-D38A15217104}"/>
+                <a16:creationId xmlns:a16="http://schemas.microsoft.com/office/drawing/2014/main" id="{F71123DE-F304-47C2-8EFB-2FBCA55DF15B}"/>
               </a:ext>
             </a:extLst>
           </p:cNvPr>
@@ -2865,7 +2865,7 @@
           <p:cNvPr id="10" name="">
             <a:extLst xmlns:a="http://schemas.openxmlformats.org/drawingml/2006/main">
               <a:ext uri="{FF2B5EF4-FFF2-40B4-BE49-F238E27FC236}">
-                <a16:creationId xmlns:a16="http://schemas.microsoft.com/office/drawing/2014/main" id="{5789DFA1-7F92-4DE4-A278-8B8BEA847E98}"/>
+                <a16:creationId xmlns:a16="http://schemas.microsoft.com/office/drawing/2014/main" id="{EC2D4F6B-7940-412E-B38E-3DAF62711F06}"/>
               </a:ext>
             </a:extLst>
           </p:cNvPr>
@@ -2922,7 +2922,7 @@
           <p:cNvPr id="11" name="">
             <a:extLst xmlns:a="http://schemas.openxmlformats.org/drawingml/2006/main">
               <a:ext uri="{FF2B5EF4-FFF2-40B4-BE49-F238E27FC236}">
-                <a16:creationId xmlns:a16="http://schemas.microsoft.com/office/drawing/2014/main" id="{0ECB77BA-B94C-4606-9BEF-B70F69C0E684}"/>
+                <a16:creationId xmlns:a16="http://schemas.microsoft.com/office/drawing/2014/main" id="{DC65F59D-89A5-4DBF-94B7-49DB439E819A}"/>
               </a:ext>
             </a:extLst>
           </p:cNvPr>
@@ -2979,7 +2979,7 @@
           <p:cNvPr id="12" name="">
             <a:extLst xmlns:a="http://schemas.openxmlformats.org/drawingml/2006/main">
               <a:ext uri="{FF2B5EF4-FFF2-40B4-BE49-F238E27FC236}">
-                <a16:creationId xmlns:a16="http://schemas.microsoft.com/office/drawing/2014/main" id="{940B9455-269E-48D6-9662-02CC34C3A678}"/>
+                <a16:creationId xmlns:a16="http://schemas.microsoft.com/office/drawing/2014/main" id="{F9CB070D-C49E-42BD-B376-AF15E3156D22}"/>
               </a:ext>
             </a:extLst>
           </p:cNvPr>
@@ -3036,7 +3036,7 @@
           <p:cNvPr id="13" name="">
             <a:extLst xmlns:a="http://schemas.openxmlformats.org/drawingml/2006/main">
               <a:ext uri="{FF2B5EF4-FFF2-40B4-BE49-F238E27FC236}">
-                <a16:creationId xmlns:a16="http://schemas.microsoft.com/office/drawing/2014/main" id="{9F1157E3-66B9-4D94-97A3-BDBC96AA2A17}"/>
+                <a16:creationId xmlns:a16="http://schemas.microsoft.com/office/drawing/2014/main" id="{FBC08730-D85D-4FE9-A44C-F9CBE200E00C}"/>
               </a:ext>
             </a:extLst>
           </p:cNvPr>
@@ -3091,7 +3091,7 @@
     </p:spTree>
     <p:extLst>
       <p:ext uri="{BB962C8B-B14F-4D97-AF65-F5344CB8AC3E}">
-        <p14:creationId xmlns:p14="http://schemas.microsoft.com/office/powerpoint/2010/main" val="356383624"/>
+        <p14:creationId xmlns:p14="http://schemas.microsoft.com/office/powerpoint/2010/main" val="746202736"/>
       </p:ext>
     </p:extLst>
   </p:cSld>
@@ -3292,7 +3292,7 @@
           <p:cNvPr id="19" name="">
             <a:extLst xmlns:a="http://schemas.openxmlformats.org/drawingml/2006/main">
               <a:ext uri="{FF2B5EF4-FFF2-40B4-BE49-F238E27FC236}">
-                <a16:creationId xmlns:a16="http://schemas.microsoft.com/office/drawing/2014/main" id="{0743B41C-DD42-4B6F-A852-4F29E2FF4762}"/>
+                <a16:creationId xmlns:a16="http://schemas.microsoft.com/office/drawing/2014/main" id="{EC56D0BE-ECA3-4EF8-AB2C-4A05C6B2F38C}"/>
               </a:ext>
             </a:extLst>
           </p:cNvPr>
@@ -3324,7 +3324,7 @@
           <p:cNvPr id="2" name="">
             <a:extLst xmlns:a="http://schemas.openxmlformats.org/drawingml/2006/main">
               <a:ext uri="{FF2B5EF4-FFF2-40B4-BE49-F238E27FC236}">
-                <a16:creationId xmlns:a16="http://schemas.microsoft.com/office/drawing/2014/main" id="{A3AEDF22-4D85-4231-8ABB-9B9DA8A25108}"/>
+                <a16:creationId xmlns:a16="http://schemas.microsoft.com/office/drawing/2014/main" id="{B84C355A-D460-4C33-8798-2B6AD00B268C}"/>
               </a:ext>
             </a:extLst>
           </p:cNvPr>
@@ -3381,7 +3381,7 @@
           <p:cNvPr id="3" name="">
             <a:extLst xmlns:a="http://schemas.openxmlformats.org/drawingml/2006/main">
               <a:ext uri="{FF2B5EF4-FFF2-40B4-BE49-F238E27FC236}">
-                <a16:creationId xmlns:a16="http://schemas.microsoft.com/office/drawing/2014/main" id="{72A7AD38-12BA-44D3-B70B-CFD5C1073299}"/>
+                <a16:creationId xmlns:a16="http://schemas.microsoft.com/office/drawing/2014/main" id="{7B80952C-DD9F-4516-9AED-9961C8525E25}"/>
               </a:ext>
             </a:extLst>
           </p:cNvPr>
@@ -3413,7 +3413,7 @@
           <p:cNvPr id="4" name="">
             <a:extLst xmlns:a="http://schemas.openxmlformats.org/drawingml/2006/main">
               <a:ext uri="{FF2B5EF4-FFF2-40B4-BE49-F238E27FC236}">
-                <a16:creationId xmlns:a16="http://schemas.microsoft.com/office/drawing/2014/main" id="{EBDF858D-4C71-4C83-A3B6-9520D4240091}"/>
+                <a16:creationId xmlns:a16="http://schemas.microsoft.com/office/drawing/2014/main" id="{A5B69A63-65A5-4181-A63E-F55C0F830824}"/>
               </a:ext>
             </a:extLst>
           </p:cNvPr>
@@ -3470,7 +3470,7 @@
           <p:cNvPr id="5" name="">
             <a:extLst xmlns:a="http://schemas.openxmlformats.org/drawingml/2006/main">
               <a:ext uri="{FF2B5EF4-FFF2-40B4-BE49-F238E27FC236}">
-                <a16:creationId xmlns:a16="http://schemas.microsoft.com/office/drawing/2014/main" id="{DCFB7202-77B6-4D01-94D3-1C2E61BEE23E}"/>
+                <a16:creationId xmlns:a16="http://schemas.microsoft.com/office/drawing/2014/main" id="{0604A4A1-5E56-4DD3-BB80-193000E2F67C}"/>
               </a:ext>
             </a:extLst>
           </p:cNvPr>
@@ -3527,7 +3527,7 @@
           <p:cNvPr id="6" name="">
             <a:extLst xmlns:a="http://schemas.openxmlformats.org/drawingml/2006/main">
               <a:ext uri="{FF2B5EF4-FFF2-40B4-BE49-F238E27FC236}">
-                <a16:creationId xmlns:a16="http://schemas.microsoft.com/office/drawing/2014/main" id="{A71A54E9-C7D6-4331-A48A-129428AA4EF4}"/>
+                <a16:creationId xmlns:a16="http://schemas.microsoft.com/office/drawing/2014/main" id="{7E0F37B3-F4C2-4DFD-AFF2-517D7B1ACC75}"/>
               </a:ext>
             </a:extLst>
           </p:cNvPr>
@@ -3584,7 +3584,7 @@
           <p:cNvPr id="7" name="">
             <a:extLst xmlns:a="http://schemas.openxmlformats.org/drawingml/2006/main">
               <a:ext uri="{FF2B5EF4-FFF2-40B4-BE49-F238E27FC236}">
-                <a16:creationId xmlns:a16="http://schemas.microsoft.com/office/drawing/2014/main" id="{DCC8A043-A47A-4084-88A3-7B8A501A54D5}"/>
+                <a16:creationId xmlns:a16="http://schemas.microsoft.com/office/drawing/2014/main" id="{31B46EB1-9B6E-4D93-946C-7B50229C0B65}"/>
               </a:ext>
             </a:extLst>
           </p:cNvPr>
@@ -3616,7 +3616,7 @@
           <p:cNvPr id="8" name="">
             <a:extLst xmlns:a="http://schemas.openxmlformats.org/drawingml/2006/main">
               <a:ext uri="{FF2B5EF4-FFF2-40B4-BE49-F238E27FC236}">
-                <a16:creationId xmlns:a16="http://schemas.microsoft.com/office/drawing/2014/main" id="{F8646356-39E4-4FA2-85F9-BE247BDAE5ED}"/>
+                <a16:creationId xmlns:a16="http://schemas.microsoft.com/office/drawing/2014/main" id="{015F10D8-3E27-4F75-BC81-5F751AA619D8}"/>
               </a:ext>
             </a:extLst>
           </p:cNvPr>
@@ -3673,7 +3673,7 @@
           <p:cNvPr id="9" name="">
             <a:extLst xmlns:a="http://schemas.openxmlformats.org/drawingml/2006/main">
               <a:ext uri="{FF2B5EF4-FFF2-40B4-BE49-F238E27FC236}">
-                <a16:creationId xmlns:a16="http://schemas.microsoft.com/office/drawing/2014/main" id="{D5596A3F-483B-4840-87E4-996450868A76}"/>
+                <a16:creationId xmlns:a16="http://schemas.microsoft.com/office/drawing/2014/main" id="{131669B9-C585-4F04-9756-0758256EFB3C}"/>
               </a:ext>
             </a:extLst>
           </p:cNvPr>
@@ -3730,7 +3730,7 @@
           <p:cNvPr id="10" name="">
             <a:extLst xmlns:a="http://schemas.openxmlformats.org/drawingml/2006/main">
               <a:ext uri="{FF2B5EF4-FFF2-40B4-BE49-F238E27FC236}">
-                <a16:creationId xmlns:a16="http://schemas.microsoft.com/office/drawing/2014/main" id="{B83AC1AA-5E45-4392-81DB-A381EC02FC9B}"/>
+                <a16:creationId xmlns:a16="http://schemas.microsoft.com/office/drawing/2014/main" id="{CC7FB24B-BEFF-4099-823F-274BA45D3738}"/>
               </a:ext>
             </a:extLst>
           </p:cNvPr>
@@ -3787,7 +3787,7 @@
           <p:cNvPr id="11" name="">
             <a:extLst xmlns:a="http://schemas.openxmlformats.org/drawingml/2006/main">
               <a:ext uri="{FF2B5EF4-FFF2-40B4-BE49-F238E27FC236}">
-                <a16:creationId xmlns:a16="http://schemas.microsoft.com/office/drawing/2014/main" id="{730390C8-DB84-4C30-AF24-086613084381}"/>
+                <a16:creationId xmlns:a16="http://schemas.microsoft.com/office/drawing/2014/main" id="{C5829427-6362-4AC5-A7E0-A3C161EE2E5A}"/>
               </a:ext>
             </a:extLst>
           </p:cNvPr>
@@ -3821,7 +3821,7 @@
           <p:cNvPr id="12" name="">
             <a:extLst xmlns:a="http://schemas.openxmlformats.org/drawingml/2006/main">
               <a:ext uri="{FF2B5EF4-FFF2-40B4-BE49-F238E27FC236}">
-                <a16:creationId xmlns:a16="http://schemas.microsoft.com/office/drawing/2014/main" id="{3CD545C5-5391-4D52-892A-9CCAE57A7F9C}"/>
+                <a16:creationId xmlns:a16="http://schemas.microsoft.com/office/drawing/2014/main" id="{28AE1B5E-5EA2-4131-BCF6-FE837DD73E65}"/>
               </a:ext>
             </a:extLst>
           </p:cNvPr>
@@ -3878,7 +3878,7 @@
           <p:cNvPr id="13" name="">
             <a:extLst xmlns:a="http://schemas.openxmlformats.org/drawingml/2006/main">
               <a:ext uri="{FF2B5EF4-FFF2-40B4-BE49-F238E27FC236}">
-                <a16:creationId xmlns:a16="http://schemas.microsoft.com/office/drawing/2014/main" id="{1508D98B-CBD8-4F4F-AB5C-08C1467841BE}"/>
+                <a16:creationId xmlns:a16="http://schemas.microsoft.com/office/drawing/2014/main" id="{AC64978F-BEC3-4A1E-B50E-FCD649F134C5}"/>
               </a:ext>
             </a:extLst>
           </p:cNvPr>
@@ -3935,7 +3935,7 @@
           <p:cNvPr id="14" name="">
             <a:extLst xmlns:a="http://schemas.openxmlformats.org/drawingml/2006/main">
               <a:ext uri="{FF2B5EF4-FFF2-40B4-BE49-F238E27FC236}">
-                <a16:creationId xmlns:a16="http://schemas.microsoft.com/office/drawing/2014/main" id="{F581AA30-BC8C-46D6-8B21-6CC6327475AF}"/>
+                <a16:creationId xmlns:a16="http://schemas.microsoft.com/office/drawing/2014/main" id="{D39E3D34-0F8E-4BD0-8E61-94EA71CF416C}"/>
               </a:ext>
             </a:extLst>
           </p:cNvPr>
@@ -3992,7 +3992,7 @@
           <p:cNvPr id="15" name="">
             <a:extLst xmlns:a="http://schemas.openxmlformats.org/drawingml/2006/main">
               <a:ext uri="{FF2B5EF4-FFF2-40B4-BE49-F238E27FC236}">
-                <a16:creationId xmlns:a16="http://schemas.microsoft.com/office/drawing/2014/main" id="{C60009B7-5223-41C7-A964-F7BD59CB648C}"/>
+                <a16:creationId xmlns:a16="http://schemas.microsoft.com/office/drawing/2014/main" id="{AB6E1BBC-E1A8-4D20-BC2A-C6375F7F7D6D}"/>
               </a:ext>
             </a:extLst>
           </p:cNvPr>
@@ -4026,7 +4026,7 @@
           <p:cNvPr id="16" name="">
             <a:extLst xmlns:a="http://schemas.openxmlformats.org/drawingml/2006/main">
               <a:ext uri="{FF2B5EF4-FFF2-40B4-BE49-F238E27FC236}">
-                <a16:creationId xmlns:a16="http://schemas.microsoft.com/office/drawing/2014/main" id="{3568F744-58A2-4FF9-BE44-A6DFD6B98FE6}"/>
+                <a16:creationId xmlns:a16="http://schemas.microsoft.com/office/drawing/2014/main" id="{560B3474-FE1F-42E2-B2CA-0497953FAB5E}"/>
               </a:ext>
             </a:extLst>
           </p:cNvPr>
@@ -4083,7 +4083,7 @@
           <p:cNvPr id="17" name="">
             <a:extLst xmlns:a="http://schemas.openxmlformats.org/drawingml/2006/main">
               <a:ext uri="{FF2B5EF4-FFF2-40B4-BE49-F238E27FC236}">
-                <a16:creationId xmlns:a16="http://schemas.microsoft.com/office/drawing/2014/main" id="{5C6974FA-FA47-4B38-8089-6DF90114F1EF}"/>
+                <a16:creationId xmlns:a16="http://schemas.microsoft.com/office/drawing/2014/main" id="{205A6ED0-9F4A-45E7-8B60-5ABC9CFE26FC}"/>
               </a:ext>
             </a:extLst>
           </p:cNvPr>
@@ -4140,7 +4140,7 @@
           <p:cNvPr id="18" name="">
             <a:extLst xmlns:a="http://schemas.openxmlformats.org/drawingml/2006/main">
               <a:ext uri="{FF2B5EF4-FFF2-40B4-BE49-F238E27FC236}">
-                <a16:creationId xmlns:a16="http://schemas.microsoft.com/office/drawing/2014/main" id="{16DBDA62-D439-41F8-9471-6DCA16A13393}"/>
+                <a16:creationId xmlns:a16="http://schemas.microsoft.com/office/drawing/2014/main" id="{980F0882-9300-426C-BC37-BEF3FB3DD925}"/>
               </a:ext>
             </a:extLst>
           </p:cNvPr>
@@ -4195,7 +4195,7 @@
     </p:spTree>
     <p:extLst>
       <p:ext uri="{BB962C8B-B14F-4D97-AF65-F5344CB8AC3E}">
-        <p14:creationId xmlns:p14="http://schemas.microsoft.com/office/powerpoint/2010/main" val="639914719"/>
+        <p14:creationId xmlns:p14="http://schemas.microsoft.com/office/powerpoint/2010/main" val="361088785"/>
       </p:ext>
     </p:extLst>
   </p:cSld>
@@ -4350,7 +4350,7 @@
           <p:cNvPr id="23" name="">
             <a:extLst xmlns:a="http://schemas.openxmlformats.org/drawingml/2006/main">
               <a:ext uri="{FF2B5EF4-FFF2-40B4-BE49-F238E27FC236}">
-                <a16:creationId xmlns:a16="http://schemas.microsoft.com/office/drawing/2014/main" id="{279E3E89-C796-4DD7-974A-75A36EB6554D}"/>
+                <a16:creationId xmlns:a16="http://schemas.microsoft.com/office/drawing/2014/main" id="{20F85584-69EC-48C0-9E99-D8E6986F7D2C}"/>
               </a:ext>
             </a:extLst>
           </p:cNvPr>
@@ -4382,7 +4382,7 @@
           <p:cNvPr id="2" name="">
             <a:extLst xmlns:a="http://schemas.openxmlformats.org/drawingml/2006/main">
               <a:ext uri="{FF2B5EF4-FFF2-40B4-BE49-F238E27FC236}">
-                <a16:creationId xmlns:a16="http://schemas.microsoft.com/office/drawing/2014/main" id="{F4045B68-5559-4EA9-97FE-314A7CDB7838}"/>
+                <a16:creationId xmlns:a16="http://schemas.microsoft.com/office/drawing/2014/main" id="{F2F34312-0B11-459B-ACF0-F9E3FB987AF6}"/>
               </a:ext>
             </a:extLst>
           </p:cNvPr>
@@ -4439,7 +4439,7 @@
           <p:cNvPr id="3" name="">
             <a:extLst xmlns:a="http://schemas.openxmlformats.org/drawingml/2006/main">
               <a:ext uri="{FF2B5EF4-FFF2-40B4-BE49-F238E27FC236}">
-                <a16:creationId xmlns:a16="http://schemas.microsoft.com/office/drawing/2014/main" id="{C51CD944-3CDE-4D16-AA12-0E04A7EE855D}"/>
+                <a16:creationId xmlns:a16="http://schemas.microsoft.com/office/drawing/2014/main" id="{3EEC241E-EE46-494A-BE69-4F91CEE991F5}"/>
               </a:ext>
             </a:extLst>
           </p:cNvPr>
@@ -4471,7 +4471,7 @@
           <p:cNvPr id="4" name="">
             <a:extLst xmlns:a="http://schemas.openxmlformats.org/drawingml/2006/main">
               <a:ext uri="{FF2B5EF4-FFF2-40B4-BE49-F238E27FC236}">
-                <a16:creationId xmlns:a16="http://schemas.microsoft.com/office/drawing/2014/main" id="{0A49EAD7-C4A5-4974-9AD2-23DA02967B45}"/>
+                <a16:creationId xmlns:a16="http://schemas.microsoft.com/office/drawing/2014/main" id="{CE3AB454-3F44-47F6-A55E-EEA8FB5AAF65}"/>
               </a:ext>
             </a:extLst>
           </p:cNvPr>
@@ -4528,7 +4528,7 @@
           <p:cNvPr id="5" name="">
             <a:extLst xmlns:a="http://schemas.openxmlformats.org/drawingml/2006/main">
               <a:ext uri="{FF2B5EF4-FFF2-40B4-BE49-F238E27FC236}">
-                <a16:creationId xmlns:a16="http://schemas.microsoft.com/office/drawing/2014/main" id="{C065E095-9DFA-403D-85C9-36D8A923D3BC}"/>
+                <a16:creationId xmlns:a16="http://schemas.microsoft.com/office/drawing/2014/main" id="{0796D325-7E72-46E4-AF2F-D337E806E0D9}"/>
               </a:ext>
             </a:extLst>
           </p:cNvPr>
@@ -4585,7 +4585,7 @@
           <p:cNvPr id="6" name="">
             <a:extLst xmlns:a="http://schemas.openxmlformats.org/drawingml/2006/main">
               <a:ext uri="{FF2B5EF4-FFF2-40B4-BE49-F238E27FC236}">
-                <a16:creationId xmlns:a16="http://schemas.microsoft.com/office/drawing/2014/main" id="{6A87EBA9-F893-44A7-AE42-68AA772FBF79}"/>
+                <a16:creationId xmlns:a16="http://schemas.microsoft.com/office/drawing/2014/main" id="{44FF4624-0A63-4EE0-B662-4A9214D13BFB}"/>
               </a:ext>
             </a:extLst>
           </p:cNvPr>
@@ -4642,7 +4642,7 @@
           <p:cNvPr id="7" name="">
             <a:extLst xmlns:a="http://schemas.openxmlformats.org/drawingml/2006/main">
               <a:ext uri="{FF2B5EF4-FFF2-40B4-BE49-F238E27FC236}">
-                <a16:creationId xmlns:a16="http://schemas.microsoft.com/office/drawing/2014/main" id="{1379DA70-178F-43C3-956F-6FC16BCDBCC2}"/>
+                <a16:creationId xmlns:a16="http://schemas.microsoft.com/office/drawing/2014/main" id="{3FDECD21-1CD9-4C4E-A763-1346DBDC3F22}"/>
               </a:ext>
             </a:extLst>
           </p:cNvPr>
@@ -4674,7 +4674,7 @@
           <p:cNvPr id="8" name="">
             <a:extLst xmlns:a="http://schemas.openxmlformats.org/drawingml/2006/main">
               <a:ext uri="{FF2B5EF4-FFF2-40B4-BE49-F238E27FC236}">
-                <a16:creationId xmlns:a16="http://schemas.microsoft.com/office/drawing/2014/main" id="{67F09E50-82B4-43D8-BD00-C5A63FD63759}"/>
+                <a16:creationId xmlns:a16="http://schemas.microsoft.com/office/drawing/2014/main" id="{E604C27F-B042-4113-98FD-3425547A110A}"/>
               </a:ext>
             </a:extLst>
           </p:cNvPr>
@@ -4731,7 +4731,7 @@
           <p:cNvPr id="9" name="">
             <a:extLst xmlns:a="http://schemas.openxmlformats.org/drawingml/2006/main">
               <a:ext uri="{FF2B5EF4-FFF2-40B4-BE49-F238E27FC236}">
-                <a16:creationId xmlns:a16="http://schemas.microsoft.com/office/drawing/2014/main" id="{5A67A457-0603-4CB7-A079-E10DDAC48927}"/>
+                <a16:creationId xmlns:a16="http://schemas.microsoft.com/office/drawing/2014/main" id="{76A8A35E-8B49-4F09-9526-76975D666542}"/>
               </a:ext>
             </a:extLst>
           </p:cNvPr>
@@ -4788,7 +4788,7 @@
           <p:cNvPr id="10" name="">
             <a:extLst xmlns:a="http://schemas.openxmlformats.org/drawingml/2006/main">
               <a:ext uri="{FF2B5EF4-FFF2-40B4-BE49-F238E27FC236}">
-                <a16:creationId xmlns:a16="http://schemas.microsoft.com/office/drawing/2014/main" id="{9E90F91A-8521-4E1A-85F9-67C53BA0BE8E}"/>
+                <a16:creationId xmlns:a16="http://schemas.microsoft.com/office/drawing/2014/main" id="{8B8DB54F-5AAF-4D5F-8DBA-8456A0BB7058}"/>
               </a:ext>
             </a:extLst>
           </p:cNvPr>
@@ -4822,7 +4822,7 @@
           <p:cNvPr id="11" name="">
             <a:extLst xmlns:a="http://schemas.openxmlformats.org/drawingml/2006/main">
               <a:ext uri="{FF2B5EF4-FFF2-40B4-BE49-F238E27FC236}">
-                <a16:creationId xmlns:a16="http://schemas.microsoft.com/office/drawing/2014/main" id="{DAECEAC4-2BB9-4EB1-B9C5-FA816D66975F}"/>
+                <a16:creationId xmlns:a16="http://schemas.microsoft.com/office/drawing/2014/main" id="{34921E7C-F6BF-49B4-8252-E622FB8C960A}"/>
               </a:ext>
             </a:extLst>
           </p:cNvPr>
@@ -4854,7 +4854,7 @@
           <p:cNvPr id="12" name="">
             <a:extLst xmlns:a="http://schemas.openxmlformats.org/drawingml/2006/main">
               <a:ext uri="{FF2B5EF4-FFF2-40B4-BE49-F238E27FC236}">
-                <a16:creationId xmlns:a16="http://schemas.microsoft.com/office/drawing/2014/main" id="{21A19372-03E9-4D90-B865-1D1D73F60D7E}"/>
+                <a16:creationId xmlns:a16="http://schemas.microsoft.com/office/drawing/2014/main" id="{215B8105-A394-41F5-AAB0-3963ACA52AC2}"/>
               </a:ext>
             </a:extLst>
           </p:cNvPr>
@@ -4911,7 +4911,7 @@
           <p:cNvPr id="13" name="">
             <a:extLst xmlns:a="http://schemas.openxmlformats.org/drawingml/2006/main">
               <a:ext uri="{FF2B5EF4-FFF2-40B4-BE49-F238E27FC236}">
-                <a16:creationId xmlns:a16="http://schemas.microsoft.com/office/drawing/2014/main" id="{1DBDC79A-6F0E-4223-8F7A-6147295CE15F}"/>
+                <a16:creationId xmlns:a16="http://schemas.microsoft.com/office/drawing/2014/main" id="{94498FB8-8400-440E-B9B9-574849E323F2}"/>
               </a:ext>
             </a:extLst>
           </p:cNvPr>
@@ -4968,7 +4968,7 @@
           <p:cNvPr id="14" name="">
             <a:extLst xmlns:a="http://schemas.openxmlformats.org/drawingml/2006/main">
               <a:ext uri="{FF2B5EF4-FFF2-40B4-BE49-F238E27FC236}">
-                <a16:creationId xmlns:a16="http://schemas.microsoft.com/office/drawing/2014/main" id="{E52DC3F4-A331-4323-BCDD-415E828DE59F}"/>
+                <a16:creationId xmlns:a16="http://schemas.microsoft.com/office/drawing/2014/main" id="{BEE6E6FE-7C90-4D3D-BC10-CF8AB5A53916}"/>
               </a:ext>
             </a:extLst>
           </p:cNvPr>
@@ -5002,7 +5002,7 @@
           <p:cNvPr id="15" name="">
             <a:extLst xmlns:a="http://schemas.openxmlformats.org/drawingml/2006/main">
               <a:ext uri="{FF2B5EF4-FFF2-40B4-BE49-F238E27FC236}">
-                <a16:creationId xmlns:a16="http://schemas.microsoft.com/office/drawing/2014/main" id="{E0A4DD22-61A1-409C-AEDB-DBD9EBA149B1}"/>
+                <a16:creationId xmlns:a16="http://schemas.microsoft.com/office/drawing/2014/main" id="{8E34F8A2-928A-4110-904F-9CFE9F79EFBB}"/>
               </a:ext>
             </a:extLst>
           </p:cNvPr>
@@ -5034,7 +5034,7 @@
           <p:cNvPr id="16" name="">
             <a:extLst xmlns:a="http://schemas.openxmlformats.org/drawingml/2006/main">
               <a:ext uri="{FF2B5EF4-FFF2-40B4-BE49-F238E27FC236}">
-                <a16:creationId xmlns:a16="http://schemas.microsoft.com/office/drawing/2014/main" id="{0C96BE6E-8961-4D9F-A18A-9740A59753BD}"/>
+                <a16:creationId xmlns:a16="http://schemas.microsoft.com/office/drawing/2014/main" id="{7659946D-EB42-4E03-B0EC-5D00F4BD2C25}"/>
               </a:ext>
             </a:extLst>
           </p:cNvPr>
@@ -5091,7 +5091,7 @@
           <p:cNvPr id="17" name="">
             <a:extLst xmlns:a="http://schemas.openxmlformats.org/drawingml/2006/main">
               <a:ext uri="{FF2B5EF4-FFF2-40B4-BE49-F238E27FC236}">
-                <a16:creationId xmlns:a16="http://schemas.microsoft.com/office/drawing/2014/main" id="{830E4882-27B7-4B1C-BE40-B9C0E78B4584}"/>
+                <a16:creationId xmlns:a16="http://schemas.microsoft.com/office/drawing/2014/main" id="{02A83216-A1AE-4643-8568-2A1CF8B45F19}"/>
               </a:ext>
             </a:extLst>
           </p:cNvPr>
@@ -5148,7 +5148,7 @@
           <p:cNvPr id="18" name="">
             <a:extLst xmlns:a="http://schemas.openxmlformats.org/drawingml/2006/main">
               <a:ext uri="{FF2B5EF4-FFF2-40B4-BE49-F238E27FC236}">
-                <a16:creationId xmlns:a16="http://schemas.microsoft.com/office/drawing/2014/main" id="{4A688B56-75F9-488E-B646-F11D6C518C5D}"/>
+                <a16:creationId xmlns:a16="http://schemas.microsoft.com/office/drawing/2014/main" id="{6A6E8149-C94E-4E93-A2E2-0D201DFD9F48}"/>
               </a:ext>
             </a:extLst>
           </p:cNvPr>
@@ -5182,7 +5182,7 @@
           <p:cNvPr id="19" name="">
             <a:extLst xmlns:a="http://schemas.openxmlformats.org/drawingml/2006/main">
               <a:ext uri="{FF2B5EF4-FFF2-40B4-BE49-F238E27FC236}">
-                <a16:creationId xmlns:a16="http://schemas.microsoft.com/office/drawing/2014/main" id="{EEECB1F9-AD24-4164-96F2-9CD3471FBD4A}"/>
+                <a16:creationId xmlns:a16="http://schemas.microsoft.com/office/drawing/2014/main" id="{93CC86C3-4E53-4516-9BF3-F3A274861C15}"/>
               </a:ext>
             </a:extLst>
           </p:cNvPr>
@@ -5214,7 +5214,7 @@
           <p:cNvPr id="20" name="">
             <a:extLst xmlns:a="http://schemas.openxmlformats.org/drawingml/2006/main">
               <a:ext uri="{FF2B5EF4-FFF2-40B4-BE49-F238E27FC236}">
-                <a16:creationId xmlns:a16="http://schemas.microsoft.com/office/drawing/2014/main" id="{B3CAD271-3D78-4256-8F3C-166695A2F519}"/>
+                <a16:creationId xmlns:a16="http://schemas.microsoft.com/office/drawing/2014/main" id="{39186230-3BF7-4135-A08C-9F3C1E0D8688}"/>
               </a:ext>
             </a:extLst>
           </p:cNvPr>
@@ -5271,7 +5271,7 @@
           <p:cNvPr id="21" name="">
             <a:extLst xmlns:a="http://schemas.openxmlformats.org/drawingml/2006/main">
               <a:ext uri="{FF2B5EF4-FFF2-40B4-BE49-F238E27FC236}">
-                <a16:creationId xmlns:a16="http://schemas.microsoft.com/office/drawing/2014/main" id="{93EF4EB4-1897-4C02-B5A9-C426DE807E8A}"/>
+                <a16:creationId xmlns:a16="http://schemas.microsoft.com/office/drawing/2014/main" id="{9E042EF4-9691-4F6A-A5C1-108B49DF996D}"/>
               </a:ext>
             </a:extLst>
           </p:cNvPr>
@@ -5328,7 +5328,7 @@
           <p:cNvPr id="22" name="">
             <a:extLst xmlns:a="http://schemas.openxmlformats.org/drawingml/2006/main">
               <a:ext uri="{FF2B5EF4-FFF2-40B4-BE49-F238E27FC236}">
-                <a16:creationId xmlns:a16="http://schemas.microsoft.com/office/drawing/2014/main" id="{62494742-4BA8-4025-B6E6-BB878036DF02}"/>
+                <a16:creationId xmlns:a16="http://schemas.microsoft.com/office/drawing/2014/main" id="{66B2E94C-7B8B-46E2-83AD-F25C6ABE37C0}"/>
               </a:ext>
             </a:extLst>
           </p:cNvPr>
@@ -5383,7 +5383,7 @@
     </p:spTree>
     <p:extLst>
       <p:ext uri="{BB962C8B-B14F-4D97-AF65-F5344CB8AC3E}">
-        <p14:creationId xmlns:p14="http://schemas.microsoft.com/office/powerpoint/2010/main" val="1543654365"/>
+        <p14:creationId xmlns:p14="http://schemas.microsoft.com/office/powerpoint/2010/main" val="1935778708"/>
       </p:ext>
     </p:extLst>
   </p:cSld>
@@ -5584,7 +5584,7 @@
           <p:cNvPr id="23" name="">
             <a:extLst xmlns:a="http://schemas.openxmlformats.org/drawingml/2006/main">
               <a:ext uri="{FF2B5EF4-FFF2-40B4-BE49-F238E27FC236}">
-                <a16:creationId xmlns:a16="http://schemas.microsoft.com/office/drawing/2014/main" id="{35A77649-4F00-4151-9C77-3AC6C4EAA968}"/>
+                <a16:creationId xmlns:a16="http://schemas.microsoft.com/office/drawing/2014/main" id="{93544DC2-83AB-4ED1-A176-A8F9DCFCFF14}"/>
               </a:ext>
             </a:extLst>
           </p:cNvPr>
@@ -5616,7 +5616,7 @@
           <p:cNvPr id="2" name="">
             <a:extLst xmlns:a="http://schemas.openxmlformats.org/drawingml/2006/main">
               <a:ext uri="{FF2B5EF4-FFF2-40B4-BE49-F238E27FC236}">
-                <a16:creationId xmlns:a16="http://schemas.microsoft.com/office/drawing/2014/main" id="{C4F19655-3040-4158-8C3E-C2E7A2893419}"/>
+                <a16:creationId xmlns:a16="http://schemas.microsoft.com/office/drawing/2014/main" id="{737AC4D3-7F53-43D4-A3F5-CA097261B555}"/>
               </a:ext>
             </a:extLst>
           </p:cNvPr>
@@ -5673,7 +5673,7 @@
           <p:cNvPr id="3" name="">
             <a:extLst xmlns:a="http://schemas.openxmlformats.org/drawingml/2006/main">
               <a:ext uri="{FF2B5EF4-FFF2-40B4-BE49-F238E27FC236}">
-                <a16:creationId xmlns:a16="http://schemas.microsoft.com/office/drawing/2014/main" id="{3244C9AC-F3D7-41E4-BFC2-DE038C20356A}"/>
+                <a16:creationId xmlns:a16="http://schemas.microsoft.com/office/drawing/2014/main" id="{D5C09585-E1A3-495F-8820-C3DD29CF92E6}"/>
               </a:ext>
             </a:extLst>
           </p:cNvPr>
@@ -5705,7 +5705,7 @@
           <p:cNvPr id="4" name="">
             <a:extLst xmlns:a="http://schemas.openxmlformats.org/drawingml/2006/main">
               <a:ext uri="{FF2B5EF4-FFF2-40B4-BE49-F238E27FC236}">
-                <a16:creationId xmlns:a16="http://schemas.microsoft.com/office/drawing/2014/main" id="{D777C34D-89CE-4F30-B242-545D18900C7D}"/>
+                <a16:creationId xmlns:a16="http://schemas.microsoft.com/office/drawing/2014/main" id="{752BAFF0-3D40-4494-93A0-6D120ACBAF39}"/>
               </a:ext>
             </a:extLst>
           </p:cNvPr>
@@ -5762,7 +5762,7 @@
           <p:cNvPr id="5" name="">
             <a:extLst xmlns:a="http://schemas.openxmlformats.org/drawingml/2006/main">
               <a:ext uri="{FF2B5EF4-FFF2-40B4-BE49-F238E27FC236}">
-                <a16:creationId xmlns:a16="http://schemas.microsoft.com/office/drawing/2014/main" id="{9A01FA83-B9FD-4C7F-80D3-5C504D549C89}"/>
+                <a16:creationId xmlns:a16="http://schemas.microsoft.com/office/drawing/2014/main" id="{218EEF01-8D2F-4EB4-98D5-2440E0929D69}"/>
               </a:ext>
             </a:extLst>
           </p:cNvPr>
@@ -5819,7 +5819,7 @@
           <p:cNvPr id="6" name="">
             <a:extLst xmlns:a="http://schemas.openxmlformats.org/drawingml/2006/main">
               <a:ext uri="{FF2B5EF4-FFF2-40B4-BE49-F238E27FC236}">
-                <a16:creationId xmlns:a16="http://schemas.microsoft.com/office/drawing/2014/main" id="{9F6A1999-206D-4888-800A-3B0641767279}"/>
+                <a16:creationId xmlns:a16="http://schemas.microsoft.com/office/drawing/2014/main" id="{0BD05DB0-7BED-447B-AAA3-17D0CB68AF25}"/>
               </a:ext>
             </a:extLst>
           </p:cNvPr>
@@ -5876,7 +5876,7 @@
           <p:cNvPr id="7" name="">
             <a:extLst xmlns:a="http://schemas.openxmlformats.org/drawingml/2006/main">
               <a:ext uri="{FF2B5EF4-FFF2-40B4-BE49-F238E27FC236}">
-                <a16:creationId xmlns:a16="http://schemas.microsoft.com/office/drawing/2014/main" id="{1A038BEB-EBB2-45BA-AEC3-0EA44F90BC4B}"/>
+                <a16:creationId xmlns:a16="http://schemas.microsoft.com/office/drawing/2014/main" id="{F229E8F2-A86E-4E5D-9C47-7849DC0BC98D}"/>
               </a:ext>
             </a:extLst>
           </p:cNvPr>
@@ -5908,7 +5908,7 @@
           <p:cNvPr id="8" name="">
             <a:extLst xmlns:a="http://schemas.openxmlformats.org/drawingml/2006/main">
               <a:ext uri="{FF2B5EF4-FFF2-40B4-BE49-F238E27FC236}">
-                <a16:creationId xmlns:a16="http://schemas.microsoft.com/office/drawing/2014/main" id="{2439CDDE-BD5A-43EC-93F0-F332A96EEF22}"/>
+                <a16:creationId xmlns:a16="http://schemas.microsoft.com/office/drawing/2014/main" id="{CE0ADDAF-64F4-4A3B-B729-E2C30598A17E}"/>
               </a:ext>
             </a:extLst>
           </p:cNvPr>
@@ -5965,7 +5965,7 @@
           <p:cNvPr id="9" name="">
             <a:extLst xmlns:a="http://schemas.openxmlformats.org/drawingml/2006/main">
               <a:ext uri="{FF2B5EF4-FFF2-40B4-BE49-F238E27FC236}">
-                <a16:creationId xmlns:a16="http://schemas.microsoft.com/office/drawing/2014/main" id="{0E785CF2-1CDF-4713-8C63-D0153E6C28E5}"/>
+                <a16:creationId xmlns:a16="http://schemas.microsoft.com/office/drawing/2014/main" id="{688D995E-39E8-4404-BA73-990716BE9048}"/>
               </a:ext>
             </a:extLst>
           </p:cNvPr>
@@ -6022,7 +6022,7 @@
           <p:cNvPr id="10" name="">
             <a:extLst xmlns:a="http://schemas.openxmlformats.org/drawingml/2006/main">
               <a:ext uri="{FF2B5EF4-FFF2-40B4-BE49-F238E27FC236}">
-                <a16:creationId xmlns:a16="http://schemas.microsoft.com/office/drawing/2014/main" id="{7C7FE66B-6FEF-4721-AADB-C60039BF5FD4}"/>
+                <a16:creationId xmlns:a16="http://schemas.microsoft.com/office/drawing/2014/main" id="{0A80ECF7-1986-49B2-BBAE-DF9197C6FBB4}"/>
               </a:ext>
             </a:extLst>
           </p:cNvPr>
@@ -6056,7 +6056,7 @@
           <p:cNvPr id="11" name="">
             <a:extLst xmlns:a="http://schemas.openxmlformats.org/drawingml/2006/main">
               <a:ext uri="{FF2B5EF4-FFF2-40B4-BE49-F238E27FC236}">
-                <a16:creationId xmlns:a16="http://schemas.microsoft.com/office/drawing/2014/main" id="{CD86F2AC-B9E5-4DB9-95D3-5C4EFD6BCAA4}"/>
+                <a16:creationId xmlns:a16="http://schemas.microsoft.com/office/drawing/2014/main" id="{00ABDC24-F146-4A4B-AD31-CBC1D4E9DFB5}"/>
               </a:ext>
             </a:extLst>
           </p:cNvPr>
@@ -6088,7 +6088,7 @@
           <p:cNvPr id="12" name="">
             <a:extLst xmlns:a="http://schemas.openxmlformats.org/drawingml/2006/main">
               <a:ext uri="{FF2B5EF4-FFF2-40B4-BE49-F238E27FC236}">
-                <a16:creationId xmlns:a16="http://schemas.microsoft.com/office/drawing/2014/main" id="{9D99F418-6793-4084-BFCB-F83794EA8F87}"/>
+                <a16:creationId xmlns:a16="http://schemas.microsoft.com/office/drawing/2014/main" id="{F24B6A19-BF82-423D-8AA7-6408BF4BBEE3}"/>
               </a:ext>
             </a:extLst>
           </p:cNvPr>
@@ -6145,7 +6145,7 @@
           <p:cNvPr id="13" name="">
             <a:extLst xmlns:a="http://schemas.openxmlformats.org/drawingml/2006/main">
               <a:ext uri="{FF2B5EF4-FFF2-40B4-BE49-F238E27FC236}">
-                <a16:creationId xmlns:a16="http://schemas.microsoft.com/office/drawing/2014/main" id="{E0A12D61-6ED6-4C68-AF7F-BF000E46AF14}"/>
+                <a16:creationId xmlns:a16="http://schemas.microsoft.com/office/drawing/2014/main" id="{051A64C9-3F26-4A42-8361-AC622BDB1F76}"/>
               </a:ext>
             </a:extLst>
           </p:cNvPr>
@@ -6202,7 +6202,7 @@
           <p:cNvPr id="14" name="">
             <a:extLst xmlns:a="http://schemas.openxmlformats.org/drawingml/2006/main">
               <a:ext uri="{FF2B5EF4-FFF2-40B4-BE49-F238E27FC236}">
-                <a16:creationId xmlns:a16="http://schemas.microsoft.com/office/drawing/2014/main" id="{5AB237BF-8FF7-4992-B905-EAAE7A11586F}"/>
+                <a16:creationId xmlns:a16="http://schemas.microsoft.com/office/drawing/2014/main" id="{18CDD6EF-6783-47E4-8B94-F1ECCEBDCC37}"/>
               </a:ext>
             </a:extLst>
           </p:cNvPr>
@@ -6236,7 +6236,7 @@
           <p:cNvPr id="15" name="">
             <a:extLst xmlns:a="http://schemas.openxmlformats.org/drawingml/2006/main">
               <a:ext uri="{FF2B5EF4-FFF2-40B4-BE49-F238E27FC236}">
-                <a16:creationId xmlns:a16="http://schemas.microsoft.com/office/drawing/2014/main" id="{83583005-42B4-401B-AE6E-47D4E48F3965}"/>
+                <a16:creationId xmlns:a16="http://schemas.microsoft.com/office/drawing/2014/main" id="{1ADB8219-63A8-4ACD-9E6C-5954B084D6B7}"/>
               </a:ext>
             </a:extLst>
           </p:cNvPr>
@@ -6268,7 +6268,7 @@
           <p:cNvPr id="16" name="">
             <a:extLst xmlns:a="http://schemas.openxmlformats.org/drawingml/2006/main">
               <a:ext uri="{FF2B5EF4-FFF2-40B4-BE49-F238E27FC236}">
-                <a16:creationId xmlns:a16="http://schemas.microsoft.com/office/drawing/2014/main" id="{916DF70C-DF0F-4750-8AFA-FC19A6EFF9A0}"/>
+                <a16:creationId xmlns:a16="http://schemas.microsoft.com/office/drawing/2014/main" id="{D523FA6A-C6AD-4F67-8142-1E1F2B46BDDC}"/>
               </a:ext>
             </a:extLst>
           </p:cNvPr>
@@ -6325,7 +6325,7 @@
           <p:cNvPr id="17" name="">
             <a:extLst xmlns:a="http://schemas.openxmlformats.org/drawingml/2006/main">
               <a:ext uri="{FF2B5EF4-FFF2-40B4-BE49-F238E27FC236}">
-                <a16:creationId xmlns:a16="http://schemas.microsoft.com/office/drawing/2014/main" id="{E7F6A7DF-C155-420C-81AF-8E3A6B0638B1}"/>
+                <a16:creationId xmlns:a16="http://schemas.microsoft.com/office/drawing/2014/main" id="{645DFFD9-DB05-45EE-955F-733A01EB5B77}"/>
               </a:ext>
             </a:extLst>
           </p:cNvPr>
@@ -6382,7 +6382,7 @@
           <p:cNvPr id="18" name="">
             <a:extLst xmlns:a="http://schemas.openxmlformats.org/drawingml/2006/main">
               <a:ext uri="{FF2B5EF4-FFF2-40B4-BE49-F238E27FC236}">
-                <a16:creationId xmlns:a16="http://schemas.microsoft.com/office/drawing/2014/main" id="{1608688B-AC40-41F5-9E53-282641164C85}"/>
+                <a16:creationId xmlns:a16="http://schemas.microsoft.com/office/drawing/2014/main" id="{5D933243-919D-495C-AE90-D29064D91411}"/>
               </a:ext>
             </a:extLst>
           </p:cNvPr>
@@ -6416,7 +6416,7 @@
           <p:cNvPr id="19" name="">
             <a:extLst xmlns:a="http://schemas.openxmlformats.org/drawingml/2006/main">
               <a:ext uri="{FF2B5EF4-FFF2-40B4-BE49-F238E27FC236}">
-                <a16:creationId xmlns:a16="http://schemas.microsoft.com/office/drawing/2014/main" id="{F94D32FF-FAED-4C8D-8FFB-D20015069AAD}"/>
+                <a16:creationId xmlns:a16="http://schemas.microsoft.com/office/drawing/2014/main" id="{F044D6B8-6C84-4A63-9910-D6EE6BC798C8}"/>
               </a:ext>
             </a:extLst>
           </p:cNvPr>
@@ -6448,7 +6448,7 @@
           <p:cNvPr id="20" name="">
             <a:extLst xmlns:a="http://schemas.openxmlformats.org/drawingml/2006/main">
               <a:ext uri="{FF2B5EF4-FFF2-40B4-BE49-F238E27FC236}">
-                <a16:creationId xmlns:a16="http://schemas.microsoft.com/office/drawing/2014/main" id="{458E0A04-F18A-4AB2-9AA8-8DA48E7112E3}"/>
+                <a16:creationId xmlns:a16="http://schemas.microsoft.com/office/drawing/2014/main" id="{EF251D94-5DC3-464D-8220-344D1A64C4F4}"/>
               </a:ext>
             </a:extLst>
           </p:cNvPr>
@@ -6505,7 +6505,7 @@
           <p:cNvPr id="21" name="">
             <a:extLst xmlns:a="http://schemas.openxmlformats.org/drawingml/2006/main">
               <a:ext uri="{FF2B5EF4-FFF2-40B4-BE49-F238E27FC236}">
-                <a16:creationId xmlns:a16="http://schemas.microsoft.com/office/drawing/2014/main" id="{150EC1FD-B8DC-4AA2-B404-9B7FC49FD7BE}"/>
+                <a16:creationId xmlns:a16="http://schemas.microsoft.com/office/drawing/2014/main" id="{FA80F9B3-CAD3-4D22-A113-4A7BC6C8F207}"/>
               </a:ext>
             </a:extLst>
           </p:cNvPr>
@@ -6562,7 +6562,7 @@
           <p:cNvPr id="22" name="">
             <a:extLst xmlns:a="http://schemas.openxmlformats.org/drawingml/2006/main">
               <a:ext uri="{FF2B5EF4-FFF2-40B4-BE49-F238E27FC236}">
-                <a16:creationId xmlns:a16="http://schemas.microsoft.com/office/drawing/2014/main" id="{95A8E2A6-66A5-4357-87C7-BEAF27700CA3}"/>
+                <a16:creationId xmlns:a16="http://schemas.microsoft.com/office/drawing/2014/main" id="{B46535B8-0A64-47B2-9015-866F0BC015F2}"/>
               </a:ext>
             </a:extLst>
           </p:cNvPr>
@@ -6617,7 +6617,7 @@
     </p:spTree>
     <p:extLst>
       <p:ext uri="{BB962C8B-B14F-4D97-AF65-F5344CB8AC3E}">
-        <p14:creationId xmlns:p14="http://schemas.microsoft.com/office/powerpoint/2010/main" val="94037215"/>
+        <p14:creationId xmlns:p14="http://schemas.microsoft.com/office/powerpoint/2010/main" val="152417967"/>
       </p:ext>
     </p:extLst>
   </p:cSld>
@@ -6818,7 +6818,7 @@
           <p:cNvPr id="16" name="">
             <a:extLst xmlns:a="http://schemas.openxmlformats.org/drawingml/2006/main">
               <a:ext uri="{FF2B5EF4-FFF2-40B4-BE49-F238E27FC236}">
-                <a16:creationId xmlns:a16="http://schemas.microsoft.com/office/drawing/2014/main" id="{08E7288A-EF48-4B27-80BD-A09DAAA88733}"/>
+                <a16:creationId xmlns:a16="http://schemas.microsoft.com/office/drawing/2014/main" id="{CEB8DF57-3421-479E-B2B9-7B81F2F885B2}"/>
               </a:ext>
             </a:extLst>
           </p:cNvPr>
@@ -6850,7 +6850,7 @@
           <p:cNvPr id="2" name="">
             <a:extLst xmlns:a="http://schemas.openxmlformats.org/drawingml/2006/main">
               <a:ext uri="{FF2B5EF4-FFF2-40B4-BE49-F238E27FC236}">
-                <a16:creationId xmlns:a16="http://schemas.microsoft.com/office/drawing/2014/main" id="{2327ACA4-6B01-44FC-B9D4-191CD7F09B9E}"/>
+                <a16:creationId xmlns:a16="http://schemas.microsoft.com/office/drawing/2014/main" id="{5594A0E0-815B-4921-8FA9-35460BE3EF4F}"/>
               </a:ext>
             </a:extLst>
           </p:cNvPr>
@@ -6907,7 +6907,7 @@
           <p:cNvPr id="3" name="">
             <a:extLst xmlns:a="http://schemas.openxmlformats.org/drawingml/2006/main">
               <a:ext uri="{FF2B5EF4-FFF2-40B4-BE49-F238E27FC236}">
-                <a16:creationId xmlns:a16="http://schemas.microsoft.com/office/drawing/2014/main" id="{B40D5D72-6090-482F-8655-B59320356211}"/>
+                <a16:creationId xmlns:a16="http://schemas.microsoft.com/office/drawing/2014/main" id="{01E35249-E904-4FD4-B116-76692AB0ABD3}"/>
               </a:ext>
             </a:extLst>
           </p:cNvPr>
@@ -6939,7 +6939,7 @@
           <p:cNvPr id="4" name="">
             <a:extLst xmlns:a="http://schemas.openxmlformats.org/drawingml/2006/main">
               <a:ext uri="{FF2B5EF4-FFF2-40B4-BE49-F238E27FC236}">
-                <a16:creationId xmlns:a16="http://schemas.microsoft.com/office/drawing/2014/main" id="{48E7E1E6-34F4-40C7-9DA6-3049553F3308}"/>
+                <a16:creationId xmlns:a16="http://schemas.microsoft.com/office/drawing/2014/main" id="{375B7CF3-604E-45C1-830D-D209058A41D6}"/>
               </a:ext>
             </a:extLst>
           </p:cNvPr>
@@ -6996,7 +6996,7 @@
           <p:cNvPr id="5" name="">
             <a:extLst xmlns:a="http://schemas.openxmlformats.org/drawingml/2006/main">
               <a:ext uri="{FF2B5EF4-FFF2-40B4-BE49-F238E27FC236}">
-                <a16:creationId xmlns:a16="http://schemas.microsoft.com/office/drawing/2014/main" id="{744E5E60-FD67-4205-9637-A7711681DABE}"/>
+                <a16:creationId xmlns:a16="http://schemas.microsoft.com/office/drawing/2014/main" id="{9F965E52-31DC-4934-9E20-173010EBD41E}"/>
               </a:ext>
             </a:extLst>
           </p:cNvPr>
@@ -7053,7 +7053,7 @@
           <p:cNvPr id="6" name="">
             <a:extLst xmlns:a="http://schemas.openxmlformats.org/drawingml/2006/main">
               <a:ext uri="{FF2B5EF4-FFF2-40B4-BE49-F238E27FC236}">
-                <a16:creationId xmlns:a16="http://schemas.microsoft.com/office/drawing/2014/main" id="{BA16E895-F69E-4E0B-81E9-D6D13C94208F}"/>
+                <a16:creationId xmlns:a16="http://schemas.microsoft.com/office/drawing/2014/main" id="{E957B39B-8F0F-4D5A-A532-CFB6038CA034}"/>
               </a:ext>
             </a:extLst>
           </p:cNvPr>
@@ -7110,7 +7110,7 @@
           <p:cNvPr id="7" name="">
             <a:extLst xmlns:a="http://schemas.openxmlformats.org/drawingml/2006/main">
               <a:ext uri="{FF2B5EF4-FFF2-40B4-BE49-F238E27FC236}">
-                <a16:creationId xmlns:a16="http://schemas.microsoft.com/office/drawing/2014/main" id="{6EFEDAD5-B3F8-4953-9DBB-12CA9F919851}"/>
+                <a16:creationId xmlns:a16="http://schemas.microsoft.com/office/drawing/2014/main" id="{C34CC481-0B03-4A5F-B1AE-8D12A0F1E6C0}"/>
               </a:ext>
             </a:extLst>
           </p:cNvPr>
@@ -7142,7 +7142,7 @@
           <p:cNvPr id="8" name="">
             <a:extLst xmlns:a="http://schemas.openxmlformats.org/drawingml/2006/main">
               <a:ext uri="{FF2B5EF4-FFF2-40B4-BE49-F238E27FC236}">
-                <a16:creationId xmlns:a16="http://schemas.microsoft.com/office/drawing/2014/main" id="{C19852D4-037B-4BA6-84D2-7B6832F041C4}"/>
+                <a16:creationId xmlns:a16="http://schemas.microsoft.com/office/drawing/2014/main" id="{55C647D4-1E55-410F-8A5D-06E9F60ECCC9}"/>
               </a:ext>
             </a:extLst>
           </p:cNvPr>
@@ -7199,7 +7199,7 @@
           <p:cNvPr id="9" name="">
             <a:extLst xmlns:a="http://schemas.openxmlformats.org/drawingml/2006/main">
               <a:ext uri="{FF2B5EF4-FFF2-40B4-BE49-F238E27FC236}">
-                <a16:creationId xmlns:a16="http://schemas.microsoft.com/office/drawing/2014/main" id="{B8603F5C-D375-4F31-A4A8-A8904919D0B7}"/>
+                <a16:creationId xmlns:a16="http://schemas.microsoft.com/office/drawing/2014/main" id="{83595330-349B-4CD1-82B3-326E384D96F6}"/>
               </a:ext>
             </a:extLst>
           </p:cNvPr>
@@ -7256,7 +7256,7 @@
           <p:cNvPr id="10" name="">
             <a:extLst xmlns:a="http://schemas.openxmlformats.org/drawingml/2006/main">
               <a:ext uri="{FF2B5EF4-FFF2-40B4-BE49-F238E27FC236}">
-                <a16:creationId xmlns:a16="http://schemas.microsoft.com/office/drawing/2014/main" id="{377471CE-143D-4462-A130-795D1B10EFFA}"/>
+                <a16:creationId xmlns:a16="http://schemas.microsoft.com/office/drawing/2014/main" id="{270EA287-5D85-41A6-898A-6AD66D273CE0}"/>
               </a:ext>
             </a:extLst>
           </p:cNvPr>
@@ -7313,7 +7313,7 @@
           <p:cNvPr id="11" name="">
             <a:extLst xmlns:a="http://schemas.openxmlformats.org/drawingml/2006/main">
               <a:ext uri="{FF2B5EF4-FFF2-40B4-BE49-F238E27FC236}">
-                <a16:creationId xmlns:a16="http://schemas.microsoft.com/office/drawing/2014/main" id="{2E29FF3C-E0AE-4AD4-B9CE-325ED6D35C8A}"/>
+                <a16:creationId xmlns:a16="http://schemas.microsoft.com/office/drawing/2014/main" id="{CF84D5BF-A9C0-4493-BF24-7C98AC38C84A}"/>
               </a:ext>
             </a:extLst>
           </p:cNvPr>
@@ -7345,7 +7345,7 @@
           <p:cNvPr id="12" name="">
             <a:extLst xmlns:a="http://schemas.openxmlformats.org/drawingml/2006/main">
               <a:ext uri="{FF2B5EF4-FFF2-40B4-BE49-F238E27FC236}">
-                <a16:creationId xmlns:a16="http://schemas.microsoft.com/office/drawing/2014/main" id="{BD30F283-742F-4498-8B60-DF091F5E2480}"/>
+                <a16:creationId xmlns:a16="http://schemas.microsoft.com/office/drawing/2014/main" id="{709D9C2B-8A57-4E18-8BD7-7D5574BE25EF}"/>
               </a:ext>
             </a:extLst>
           </p:cNvPr>
@@ -7402,7 +7402,7 @@
           <p:cNvPr id="13" name="">
             <a:extLst xmlns:a="http://schemas.openxmlformats.org/drawingml/2006/main">
               <a:ext uri="{FF2B5EF4-FFF2-40B4-BE49-F238E27FC236}">
-                <a16:creationId xmlns:a16="http://schemas.microsoft.com/office/drawing/2014/main" id="{91AF55D4-F1F6-4E82-807D-E4A7574CE5A0}"/>
+                <a16:creationId xmlns:a16="http://schemas.microsoft.com/office/drawing/2014/main" id="{652CF0B3-843B-4754-B834-87B121525786}"/>
               </a:ext>
             </a:extLst>
           </p:cNvPr>
@@ -7459,7 +7459,7 @@
           <p:cNvPr id="14" name="">
             <a:extLst xmlns:a="http://schemas.openxmlformats.org/drawingml/2006/main">
               <a:ext uri="{FF2B5EF4-FFF2-40B4-BE49-F238E27FC236}">
-                <a16:creationId xmlns:a16="http://schemas.microsoft.com/office/drawing/2014/main" id="{9EDC3E36-922F-4302-AF31-0D1B5A49DFA2}"/>
+                <a16:creationId xmlns:a16="http://schemas.microsoft.com/office/drawing/2014/main" id="{E613F020-8E24-470B-9294-169A1A358936}"/>
               </a:ext>
             </a:extLst>
           </p:cNvPr>
@@ -7516,7 +7516,7 @@
           <p:cNvPr id="15" name="">
             <a:extLst xmlns:a="http://schemas.openxmlformats.org/drawingml/2006/main">
               <a:ext uri="{FF2B5EF4-FFF2-40B4-BE49-F238E27FC236}">
-                <a16:creationId xmlns:a16="http://schemas.microsoft.com/office/drawing/2014/main" id="{0D419C9E-0569-42CA-948D-86BAA99DA429}"/>
+                <a16:creationId xmlns:a16="http://schemas.microsoft.com/office/drawing/2014/main" id="{5BB751AB-755E-45BA-BB54-31AE1689A43A}"/>
               </a:ext>
             </a:extLst>
           </p:cNvPr>
@@ -7571,7 +7571,7 @@
     </p:spTree>
     <p:extLst>
       <p:ext uri="{BB962C8B-B14F-4D97-AF65-F5344CB8AC3E}">
-        <p14:creationId xmlns:p14="http://schemas.microsoft.com/office/powerpoint/2010/main" val="380243913"/>
+        <p14:creationId xmlns:p14="http://schemas.microsoft.com/office/powerpoint/2010/main" val="339430927"/>
       </p:ext>
     </p:extLst>
   </p:cSld>
@@ -7769,10 +7769,10 @@
       </p:grpSpPr>
       <p:sp>
         <p:nvSpPr>
-          <p:cNvPr id="23" name="">
-            <a:extLst xmlns:a="http://schemas.openxmlformats.org/drawingml/2006/main">
-              <a:ext uri="{FF2B5EF4-FFF2-40B4-BE49-F238E27FC236}">
-                <a16:creationId xmlns:a16="http://schemas.microsoft.com/office/drawing/2014/main" id="{DA197DB5-797E-47AE-8B6D-B68CA176224D}"/>
+          <p:cNvPr id="26" name="">
+            <a:extLst xmlns:a="http://schemas.openxmlformats.org/drawingml/2006/main">
+              <a:ext uri="{FF2B5EF4-FFF2-40B4-BE49-F238E27FC236}">
+                <a16:creationId xmlns:a16="http://schemas.microsoft.com/office/drawing/2014/main" id="{4F5A12EA-EDE2-4E95-8E02-E69241650C14}"/>
               </a:ext>
             </a:extLst>
           </p:cNvPr>
@@ -7804,7 +7804,7 @@
           <p:cNvPr id="2" name="">
             <a:extLst xmlns:a="http://schemas.openxmlformats.org/drawingml/2006/main">
               <a:ext uri="{FF2B5EF4-FFF2-40B4-BE49-F238E27FC236}">
-                <a16:creationId xmlns:a16="http://schemas.microsoft.com/office/drawing/2014/main" id="{728B0C29-97BD-4EE1-AFCA-CE56ACD1A23B}"/>
+                <a16:creationId xmlns:a16="http://schemas.microsoft.com/office/drawing/2014/main" id="{4EDC0DA2-6F3A-4C42-88F6-1C3933253B99}"/>
               </a:ext>
             </a:extLst>
           </p:cNvPr>
@@ -7861,7 +7861,7 @@
           <p:cNvPr id="3" name="">
             <a:extLst xmlns:a="http://schemas.openxmlformats.org/drawingml/2006/main">
               <a:ext uri="{FF2B5EF4-FFF2-40B4-BE49-F238E27FC236}">
-                <a16:creationId xmlns:a16="http://schemas.microsoft.com/office/drawing/2014/main" id="{87D66CE4-C3B4-48FF-A2D1-95005365A23C}"/>
+                <a16:creationId xmlns:a16="http://schemas.microsoft.com/office/drawing/2014/main" id="{2F37A736-CE07-4662-ACB1-1C62A411C1E5}"/>
               </a:ext>
             </a:extLst>
           </p:cNvPr>
@@ -7893,7 +7893,7 @@
           <p:cNvPr id="4" name="">
             <a:extLst xmlns:a="http://schemas.openxmlformats.org/drawingml/2006/main">
               <a:ext uri="{FF2B5EF4-FFF2-40B4-BE49-F238E27FC236}">
-                <a16:creationId xmlns:a16="http://schemas.microsoft.com/office/drawing/2014/main" id="{D6C8111E-4324-4F40-96E6-3B1527D8E873}"/>
+                <a16:creationId xmlns:a16="http://schemas.microsoft.com/office/drawing/2014/main" id="{E6123022-7DCC-4C45-9239-6A48C436EC35}"/>
               </a:ext>
             </a:extLst>
           </p:cNvPr>
@@ -7950,7 +7950,7 @@
           <p:cNvPr id="5" name="">
             <a:extLst xmlns:a="http://schemas.openxmlformats.org/drawingml/2006/main">
               <a:ext uri="{FF2B5EF4-FFF2-40B4-BE49-F238E27FC236}">
-                <a16:creationId xmlns:a16="http://schemas.microsoft.com/office/drawing/2014/main" id="{BC23DDB6-3EAA-4209-B9F1-046880AAD552}"/>
+                <a16:creationId xmlns:a16="http://schemas.microsoft.com/office/drawing/2014/main" id="{2FB9AB6A-0355-4D71-9E29-4FB3DF2097C2}"/>
               </a:ext>
             </a:extLst>
           </p:cNvPr>
@@ -8007,7 +8007,7 @@
           <p:cNvPr id="6" name="">
             <a:extLst xmlns:a="http://schemas.openxmlformats.org/drawingml/2006/main">
               <a:ext uri="{FF2B5EF4-FFF2-40B4-BE49-F238E27FC236}">
-                <a16:creationId xmlns:a16="http://schemas.microsoft.com/office/drawing/2014/main" id="{FDC6FFE1-301A-40DC-8203-E0CE7BD91FA3}"/>
+                <a16:creationId xmlns:a16="http://schemas.microsoft.com/office/drawing/2014/main" id="{210E8AF0-3DF6-4822-B200-BBD92CE637F2}"/>
               </a:ext>
             </a:extLst>
           </p:cNvPr>
@@ -8064,7 +8064,7 @@
           <p:cNvPr id="7" name="">
             <a:extLst xmlns:a="http://schemas.openxmlformats.org/drawingml/2006/main">
               <a:ext uri="{FF2B5EF4-FFF2-40B4-BE49-F238E27FC236}">
-                <a16:creationId xmlns:a16="http://schemas.microsoft.com/office/drawing/2014/main" id="{8811E2DC-CA63-4E79-BAE5-8E2E20B9B39F}"/>
+                <a16:creationId xmlns:a16="http://schemas.microsoft.com/office/drawing/2014/main" id="{D14146F8-A051-4D94-BCC5-2A1552041FAF}"/>
               </a:ext>
             </a:extLst>
           </p:cNvPr>
@@ -8096,7 +8096,7 @@
           <p:cNvPr id="8" name="">
             <a:extLst xmlns:a="http://schemas.openxmlformats.org/drawingml/2006/main">
               <a:ext uri="{FF2B5EF4-FFF2-40B4-BE49-F238E27FC236}">
-                <a16:creationId xmlns:a16="http://schemas.microsoft.com/office/drawing/2014/main" id="{B742D6D7-D73B-4F9F-8186-73BFE672A4C8}"/>
+                <a16:creationId xmlns:a16="http://schemas.microsoft.com/office/drawing/2014/main" id="{A60DC05D-79BA-48D8-A9E5-6FE3B5489157}"/>
               </a:ext>
             </a:extLst>
           </p:cNvPr>
@@ -8153,7 +8153,7 @@
           <p:cNvPr id="9" name="">
             <a:extLst xmlns:a="http://schemas.openxmlformats.org/drawingml/2006/main">
               <a:ext uri="{FF2B5EF4-FFF2-40B4-BE49-F238E27FC236}">
-                <a16:creationId xmlns:a16="http://schemas.microsoft.com/office/drawing/2014/main" id="{EEC11E20-741B-4A42-AA70-183C0FAA4414}"/>
+                <a16:creationId xmlns:a16="http://schemas.microsoft.com/office/drawing/2014/main" id="{FE37CA79-A618-40B1-9E0E-BE8A050EDB6A}"/>
               </a:ext>
             </a:extLst>
           </p:cNvPr>
@@ -8210,19 +8210,19 @@
           <p:cNvPr id="10" name="">
             <a:extLst xmlns:a="http://schemas.openxmlformats.org/drawingml/2006/main">
               <a:ext uri="{FF2B5EF4-FFF2-40B4-BE49-F238E27FC236}">
-                <a16:creationId xmlns:a16="http://schemas.microsoft.com/office/drawing/2014/main" id="{64FEBDE6-B56E-48AD-9C87-040C265AA4C8}"/>
-              </a:ext>
-            </a:extLst>
-          </p:cNvPr>
-          <p:cNvSpPr>
-            <a:spLocks xmlns:a="http://schemas.openxmlformats.org/drawingml/2006/main" noGrp="1"/>
-          </p:cNvSpPr>
-          <p:nvPr/>
-        </p:nvSpPr>
-        <p:spPr>
-          <a:xfrm xmlns:a="http://schemas.openxmlformats.org/drawingml/2006/main">
-            <a:off x="914400" y="1257300"/>
-            <a:ext cx="10363200" cy="781050"/>
+                <a16:creationId xmlns:a16="http://schemas.microsoft.com/office/drawing/2014/main" id="{CC37C944-DC7D-4C4B-9079-A28648F17B8C}"/>
+              </a:ext>
+            </a:extLst>
+          </p:cNvPr>
+          <p:cNvSpPr>
+            <a:spLocks xmlns:a="http://schemas.openxmlformats.org/drawingml/2006/main" noGrp="1"/>
+          </p:cNvSpPr>
+          <p:nvPr/>
+        </p:nvSpPr>
+        <p:spPr>
+          <a:xfrm xmlns:a="http://schemas.openxmlformats.org/drawingml/2006/main">
+            <a:off x="857250" y="1219200"/>
+            <a:ext cx="10477500" cy="742950"/>
           </a:xfrm>
           <a:prstGeom xmlns:a="http://schemas.openxmlformats.org/drawingml/2006/main" prst="rect">
             <a:avLst/>
@@ -8239,7 +8239,7 @@
           <a:lstStyle xmlns:a="http://schemas.openxmlformats.org/drawingml/2006/main"/>
           <a:p xmlns:a="http://schemas.openxmlformats.org/drawingml/2006/main">
             <a:pPr algn="ctr">
-              <a:defRPr sz="2175" b="1">
+              <a:defRPr sz="2100" b="1">
                 <a:solidFill>
                   <a:srgbClr val="17253A"/>
                 </a:solidFill>
@@ -8249,7 +8249,7 @@
               </a:defRPr>
             </a:pPr>
             <a:r>
-              <a:rPr sz="2175" b="1">
+              <a:rPr sz="2100" b="1">
                 <a:solidFill>
                   <a:srgbClr val="17253A"/>
                 </a:solidFill>
@@ -8267,28 +8267,30 @@
           <p:cNvPr id="11" name="">
             <a:extLst xmlns:a="http://schemas.openxmlformats.org/drawingml/2006/main">
               <a:ext uri="{FF2B5EF4-FFF2-40B4-BE49-F238E27FC236}">
-                <a16:creationId xmlns:a16="http://schemas.microsoft.com/office/drawing/2014/main" id="{E03582D4-4275-41BA-9E76-D029AAB3046F}"/>
-              </a:ext>
-            </a:extLst>
-          </p:cNvPr>
-          <p:cNvSpPr>
-            <a:spLocks xmlns:a="http://schemas.openxmlformats.org/drawingml/2006/main" noGrp="1"/>
-          </p:cNvSpPr>
-          <p:nvPr/>
-        </p:nvSpPr>
-        <p:spPr>
-          <a:xfrm xmlns:a="http://schemas.openxmlformats.org/drawingml/2006/main">
-            <a:off x="1000125" y="2247900"/>
-            <a:ext cx="476250" cy="476250"/>
-          </a:xfrm>
-          <a:prstGeom xmlns:a="http://schemas.openxmlformats.org/drawingml/2006/main" prst="ellipse">
+                <a16:creationId xmlns:a16="http://schemas.microsoft.com/office/drawing/2014/main" id="{BBF8D66A-61B7-46FE-B3C1-8B216F3435E1}"/>
+              </a:ext>
+            </a:extLst>
+          </p:cNvPr>
+          <p:cNvSpPr>
+            <a:spLocks xmlns:a="http://schemas.openxmlformats.org/drawingml/2006/main" noGrp="1"/>
+          </p:cNvSpPr>
+          <p:nvPr/>
+        </p:nvSpPr>
+        <p:spPr>
+          <a:xfrm xmlns:a="http://schemas.openxmlformats.org/drawingml/2006/main">
+            <a:off x="971550" y="2124075"/>
+            <a:ext cx="38100" cy="3524250"/>
+          </a:xfrm>
+          <a:prstGeom xmlns:a="http://schemas.openxmlformats.org/drawingml/2006/main" prst="rect">
             <a:avLst/>
           </a:prstGeom>
           <a:solidFill xmlns:a="http://schemas.openxmlformats.org/drawingml/2006/main">
-            <a:srgbClr val="18324A"/>
+            <a:srgbClr val="2C6E73"/>
           </a:solidFill>
           <a:ln xmlns:a="http://schemas.openxmlformats.org/drawingml/2006/main" w="0">
-            <a:noFill/>
+            <a:solidFill>
+              <a:srgbClr val="2C6E73"/>
+            </a:solidFill>
           </a:ln>
         </p:spPr>
       </p:sp>
@@ -8297,19 +8299,19 @@
           <p:cNvPr id="12" name="">
             <a:extLst xmlns:a="http://schemas.openxmlformats.org/drawingml/2006/main">
               <a:ext uri="{FF2B5EF4-FFF2-40B4-BE49-F238E27FC236}">
-                <a16:creationId xmlns:a16="http://schemas.microsoft.com/office/drawing/2014/main" id="{7C966AF9-FE00-4084-87B9-32928F34E639}"/>
-              </a:ext>
-            </a:extLst>
-          </p:cNvPr>
-          <p:cNvSpPr>
-            <a:spLocks xmlns:a="http://schemas.openxmlformats.org/drawingml/2006/main" noGrp="1"/>
-          </p:cNvSpPr>
-          <p:nvPr/>
-        </p:nvSpPr>
-        <p:spPr>
-          <a:xfrm xmlns:a="http://schemas.openxmlformats.org/drawingml/2006/main">
-            <a:off x="1000125" y="2276475"/>
-            <a:ext cx="476250" cy="419100"/>
+                <a16:creationId xmlns:a16="http://schemas.microsoft.com/office/drawing/2014/main" id="{6D39FD5B-81CC-4E09-AC6E-8DD2D74818F6}"/>
+              </a:ext>
+            </a:extLst>
+          </p:cNvPr>
+          <p:cNvSpPr>
+            <a:spLocks xmlns:a="http://schemas.openxmlformats.org/drawingml/2006/main" noGrp="1"/>
+          </p:cNvSpPr>
+          <p:nvPr/>
+        </p:nvSpPr>
+        <p:spPr>
+          <a:xfrm xmlns:a="http://schemas.openxmlformats.org/drawingml/2006/main">
+            <a:off x="1162050" y="2200275"/>
+            <a:ext cx="400050" cy="400050"/>
           </a:xfrm>
           <a:prstGeom xmlns:a="http://schemas.openxmlformats.org/drawingml/2006/main" prst="rect">
             <a:avLst/>
@@ -8326,9 +8328,9 @@
           <a:lstStyle xmlns:a="http://schemas.openxmlformats.org/drawingml/2006/main"/>
           <a:p xmlns:a="http://schemas.openxmlformats.org/drawingml/2006/main">
             <a:pPr algn="ctr">
-              <a:defRPr sz="1350" b="1">
-                <a:solidFill>
-                  <a:srgbClr val="FFFFFF"/>
+              <a:defRPr sz="1125" b="1">
+                <a:solidFill>
+                  <a:srgbClr val="2C6E73"/>
                 </a:solidFill>
                 <a:latin typeface="Arial"/>
                 <a:ea typeface="Arial"/>
@@ -8336,9 +8338,9 @@
               </a:defRPr>
             </a:pPr>
             <a:r>
-              <a:rPr sz="1350" b="1">
-                <a:solidFill>
-                  <a:srgbClr val="FFFFFF"/>
+              <a:rPr sz="1125" b="1">
+                <a:solidFill>
+                  <a:srgbClr val="2C6E73"/>
                 </a:solidFill>
                 <a:latin typeface="Arial"/>
                 <a:ea typeface="Arial"/>
@@ -8354,19 +8356,19 @@
           <p:cNvPr id="13" name="">
             <a:extLst xmlns:a="http://schemas.openxmlformats.org/drawingml/2006/main">
               <a:ext uri="{FF2B5EF4-FFF2-40B4-BE49-F238E27FC236}">
-                <a16:creationId xmlns:a16="http://schemas.microsoft.com/office/drawing/2014/main" id="{4BE49C8D-4D3F-4B5F-A64E-9D33EB870EAD}"/>
-              </a:ext>
-            </a:extLst>
-          </p:cNvPr>
-          <p:cNvSpPr>
-            <a:spLocks xmlns:a="http://schemas.openxmlformats.org/drawingml/2006/main" noGrp="1"/>
-          </p:cNvSpPr>
-          <p:nvPr/>
-        </p:nvSpPr>
-        <p:spPr>
-          <a:xfrm xmlns:a="http://schemas.openxmlformats.org/drawingml/2006/main">
-            <a:off x="1714500" y="2181225"/>
-            <a:ext cx="9429750" cy="609600"/>
+                <a16:creationId xmlns:a16="http://schemas.microsoft.com/office/drawing/2014/main" id="{A174012D-AFE6-471D-8E33-C4AAA4C9436F}"/>
+              </a:ext>
+            </a:extLst>
+          </p:cNvPr>
+          <p:cNvSpPr>
+            <a:spLocks xmlns:a="http://schemas.openxmlformats.org/drawingml/2006/main" noGrp="1"/>
+          </p:cNvSpPr>
+          <p:nvPr/>
+        </p:nvSpPr>
+        <p:spPr>
+          <a:xfrm xmlns:a="http://schemas.openxmlformats.org/drawingml/2006/main">
+            <a:off x="1714500" y="2114550"/>
+            <a:ext cx="9525000" cy="638175"/>
           </a:xfrm>
           <a:prstGeom xmlns:a="http://schemas.openxmlformats.org/drawingml/2006/main" prst="rect">
             <a:avLst/>
@@ -8383,7 +8385,7 @@
           <a:lstStyle xmlns:a="http://schemas.openxmlformats.org/drawingml/2006/main"/>
           <a:p xmlns:a="http://schemas.openxmlformats.org/drawingml/2006/main">
             <a:pPr algn="l">
-              <a:defRPr sz="1500" b="0">
+              <a:defRPr sz="1575" b="0">
                 <a:solidFill>
                   <a:srgbClr val="17253A"/>
                 </a:solidFill>
@@ -8393,7 +8395,7 @@
               </a:defRPr>
             </a:pPr>
             <a:r>
-              <a:rPr sz="1500" b="0">
+              <a:rPr sz="1575" b="0">
                 <a:solidFill>
                   <a:srgbClr val="17253A"/>
                 </a:solidFill>
@@ -8401,7 +8403,7 @@
                 <a:ea typeface="Arial"/>
                 <a:cs typeface="Arial"/>
               </a:rPr>
-              <a:t>Identify the structure: Identify what changes and what stays constant.</a:t>
+              <a:t>A = 3b + 2c</a:t>
             </a:r>
           </a:p>
         </p:txBody>
@@ -8411,28 +8413,30 @@
           <p:cNvPr id="14" name="">
             <a:extLst xmlns:a="http://schemas.openxmlformats.org/drawingml/2006/main">
               <a:ext uri="{FF2B5EF4-FFF2-40B4-BE49-F238E27FC236}">
-                <a16:creationId xmlns:a16="http://schemas.microsoft.com/office/drawing/2014/main" id="{88126DE0-2108-4E8C-A3B4-22786E24B549}"/>
-              </a:ext>
-            </a:extLst>
-          </p:cNvPr>
-          <p:cNvSpPr>
-            <a:spLocks xmlns:a="http://schemas.openxmlformats.org/drawingml/2006/main" noGrp="1"/>
-          </p:cNvSpPr>
-          <p:nvPr/>
-        </p:nvSpPr>
-        <p:spPr>
-          <a:xfrm xmlns:a="http://schemas.openxmlformats.org/drawingml/2006/main">
-            <a:off x="1000125" y="2990850"/>
-            <a:ext cx="476250" cy="476250"/>
-          </a:xfrm>
-          <a:prstGeom xmlns:a="http://schemas.openxmlformats.org/drawingml/2006/main" prst="ellipse">
+                <a16:creationId xmlns:a16="http://schemas.microsoft.com/office/drawing/2014/main" id="{8850C594-6F03-4070-8586-A8C510EB728E}"/>
+              </a:ext>
+            </a:extLst>
+          </p:cNvPr>
+          <p:cNvSpPr>
+            <a:spLocks xmlns:a="http://schemas.openxmlformats.org/drawingml/2006/main" noGrp="1"/>
+          </p:cNvSpPr>
+          <p:nvPr/>
+        </p:nvSpPr>
+        <p:spPr>
+          <a:xfrm xmlns:a="http://schemas.openxmlformats.org/drawingml/2006/main">
+            <a:off x="1714500" y="2771775"/>
+            <a:ext cx="9334500" cy="9525"/>
+          </a:xfrm>
+          <a:prstGeom xmlns:a="http://schemas.openxmlformats.org/drawingml/2006/main" prst="rect">
             <a:avLst/>
           </a:prstGeom>
           <a:solidFill xmlns:a="http://schemas.openxmlformats.org/drawingml/2006/main">
-            <a:srgbClr val="2C6E73"/>
+            <a:srgbClr val="D9E0E6"/>
           </a:solidFill>
           <a:ln xmlns:a="http://schemas.openxmlformats.org/drawingml/2006/main" w="0">
-            <a:noFill/>
+            <a:solidFill>
+              <a:srgbClr val="D9E0E6"/>
+            </a:solidFill>
           </a:ln>
         </p:spPr>
       </p:sp>
@@ -8441,19 +8445,19 @@
           <p:cNvPr id="15" name="">
             <a:extLst xmlns:a="http://schemas.openxmlformats.org/drawingml/2006/main">
               <a:ext uri="{FF2B5EF4-FFF2-40B4-BE49-F238E27FC236}">
-                <a16:creationId xmlns:a16="http://schemas.microsoft.com/office/drawing/2014/main" id="{91D9CC39-37B9-4184-AFFD-BC7F801D886B}"/>
-              </a:ext>
-            </a:extLst>
-          </p:cNvPr>
-          <p:cNvSpPr>
-            <a:spLocks xmlns:a="http://schemas.openxmlformats.org/drawingml/2006/main" noGrp="1"/>
-          </p:cNvSpPr>
-          <p:nvPr/>
-        </p:nvSpPr>
-        <p:spPr>
-          <a:xfrm xmlns:a="http://schemas.openxmlformats.org/drawingml/2006/main">
-            <a:off x="1000125" y="3019425"/>
-            <a:ext cx="476250" cy="419100"/>
+                <a16:creationId xmlns:a16="http://schemas.microsoft.com/office/drawing/2014/main" id="{E03F19D4-4E0C-443D-9DED-139F34618407}"/>
+              </a:ext>
+            </a:extLst>
+          </p:cNvPr>
+          <p:cNvSpPr>
+            <a:spLocks xmlns:a="http://schemas.openxmlformats.org/drawingml/2006/main" noGrp="1"/>
+          </p:cNvSpPr>
+          <p:nvPr/>
+        </p:nvSpPr>
+        <p:spPr>
+          <a:xfrm xmlns:a="http://schemas.openxmlformats.org/drawingml/2006/main">
+            <a:off x="1162050" y="2905125"/>
+            <a:ext cx="400050" cy="400050"/>
           </a:xfrm>
           <a:prstGeom xmlns:a="http://schemas.openxmlformats.org/drawingml/2006/main" prst="rect">
             <a:avLst/>
@@ -8470,9 +8474,9 @@
           <a:lstStyle xmlns:a="http://schemas.openxmlformats.org/drawingml/2006/main"/>
           <a:p xmlns:a="http://schemas.openxmlformats.org/drawingml/2006/main">
             <a:pPr algn="ctr">
-              <a:defRPr sz="1350" b="1">
-                <a:solidFill>
-                  <a:srgbClr val="FFFFFF"/>
+              <a:defRPr sz="1125" b="1">
+                <a:solidFill>
+                  <a:srgbClr val="2C6E73"/>
                 </a:solidFill>
                 <a:latin typeface="Arial"/>
                 <a:ea typeface="Arial"/>
@@ -8480,9 +8484,9 @@
               </a:defRPr>
             </a:pPr>
             <a:r>
-              <a:rPr sz="1350" b="1">
-                <a:solidFill>
-                  <a:srgbClr val="FFFFFF"/>
+              <a:rPr sz="1125" b="1">
+                <a:solidFill>
+                  <a:srgbClr val="2C6E73"/>
                 </a:solidFill>
                 <a:latin typeface="Arial"/>
                 <a:ea typeface="Arial"/>
@@ -8498,19 +8502,19 @@
           <p:cNvPr id="16" name="">
             <a:extLst xmlns:a="http://schemas.openxmlformats.org/drawingml/2006/main">
               <a:ext uri="{FF2B5EF4-FFF2-40B4-BE49-F238E27FC236}">
-                <a16:creationId xmlns:a16="http://schemas.microsoft.com/office/drawing/2014/main" id="{92487C24-E627-44DA-ABD6-2A85304E0194}"/>
-              </a:ext>
-            </a:extLst>
-          </p:cNvPr>
-          <p:cNvSpPr>
-            <a:spLocks xmlns:a="http://schemas.openxmlformats.org/drawingml/2006/main" noGrp="1"/>
-          </p:cNvSpPr>
-          <p:nvPr/>
-        </p:nvSpPr>
-        <p:spPr>
-          <a:xfrm xmlns:a="http://schemas.openxmlformats.org/drawingml/2006/main">
-            <a:off x="1714500" y="2924175"/>
-            <a:ext cx="9429750" cy="609600"/>
+                <a16:creationId xmlns:a16="http://schemas.microsoft.com/office/drawing/2014/main" id="{F1C3807E-1F52-4C60-8388-401FBA8F1550}"/>
+              </a:ext>
+            </a:extLst>
+          </p:cNvPr>
+          <p:cNvSpPr>
+            <a:spLocks xmlns:a="http://schemas.openxmlformats.org/drawingml/2006/main" noGrp="1"/>
+          </p:cNvSpPr>
+          <p:nvPr/>
+        </p:nvSpPr>
+        <p:spPr>
+          <a:xfrm xmlns:a="http://schemas.openxmlformats.org/drawingml/2006/main">
+            <a:off x="1714500" y="2819400"/>
+            <a:ext cx="9525000" cy="638175"/>
           </a:xfrm>
           <a:prstGeom xmlns:a="http://schemas.openxmlformats.org/drawingml/2006/main" prst="rect">
             <a:avLst/>
@@ -8527,7 +8531,7 @@
           <a:lstStyle xmlns:a="http://schemas.openxmlformats.org/drawingml/2006/main"/>
           <a:p xmlns:a="http://schemas.openxmlformats.org/drawingml/2006/main">
             <a:pPr algn="l">
-              <a:defRPr sz="1500" b="0">
+              <a:defRPr sz="1575" b="0">
                 <a:solidFill>
                   <a:srgbClr val="17253A"/>
                 </a:solidFill>
@@ -8537,7 +8541,7 @@
               </a:defRPr>
             </a:pPr>
             <a:r>
-              <a:rPr sz="1500" b="0">
+              <a:rPr sz="1575" b="0">
                 <a:solidFill>
                   <a:srgbClr val="17253A"/>
                 </a:solidFill>
@@ -8545,7 +8549,7 @@
                 <a:ea typeface="Arial"/>
                 <a:cs typeface="Arial"/>
               </a:rPr>
-              <a:t>Set up the method: Express the relationship with words, a table or a formula.</a:t>
+              <a:t>Substitute b = 7 and c = 5</a:t>
             </a:r>
           </a:p>
         </p:txBody>
@@ -8555,28 +8559,30 @@
           <p:cNvPr id="17" name="">
             <a:extLst xmlns:a="http://schemas.openxmlformats.org/drawingml/2006/main">
               <a:ext uri="{FF2B5EF4-FFF2-40B4-BE49-F238E27FC236}">
-                <a16:creationId xmlns:a16="http://schemas.microsoft.com/office/drawing/2014/main" id="{1AA3C403-AD8E-45FC-BA61-DE202BE587C8}"/>
-              </a:ext>
-            </a:extLst>
-          </p:cNvPr>
-          <p:cNvSpPr>
-            <a:spLocks xmlns:a="http://schemas.openxmlformats.org/drawingml/2006/main" noGrp="1"/>
-          </p:cNvSpPr>
-          <p:nvPr/>
-        </p:nvSpPr>
-        <p:spPr>
-          <a:xfrm xmlns:a="http://schemas.openxmlformats.org/drawingml/2006/main">
-            <a:off x="1000125" y="3733800"/>
-            <a:ext cx="476250" cy="476250"/>
-          </a:xfrm>
-          <a:prstGeom xmlns:a="http://schemas.openxmlformats.org/drawingml/2006/main" prst="ellipse">
+                <a16:creationId xmlns:a16="http://schemas.microsoft.com/office/drawing/2014/main" id="{5B200543-6370-4C48-B1B3-F07EF4F6AA4C}"/>
+              </a:ext>
+            </a:extLst>
+          </p:cNvPr>
+          <p:cNvSpPr>
+            <a:spLocks xmlns:a="http://schemas.openxmlformats.org/drawingml/2006/main" noGrp="1"/>
+          </p:cNvSpPr>
+          <p:nvPr/>
+        </p:nvSpPr>
+        <p:spPr>
+          <a:xfrm xmlns:a="http://schemas.openxmlformats.org/drawingml/2006/main">
+            <a:off x="1714500" y="3476625"/>
+            <a:ext cx="9334500" cy="9525"/>
+          </a:xfrm>
+          <a:prstGeom xmlns:a="http://schemas.openxmlformats.org/drawingml/2006/main" prst="rect">
             <a:avLst/>
           </a:prstGeom>
           <a:solidFill xmlns:a="http://schemas.openxmlformats.org/drawingml/2006/main">
-            <a:srgbClr val="2C6E73"/>
+            <a:srgbClr val="D9E0E6"/>
           </a:solidFill>
           <a:ln xmlns:a="http://schemas.openxmlformats.org/drawingml/2006/main" w="0">
-            <a:noFill/>
+            <a:solidFill>
+              <a:srgbClr val="D9E0E6"/>
+            </a:solidFill>
           </a:ln>
         </p:spPr>
       </p:sp>
@@ -8585,19 +8591,19 @@
           <p:cNvPr id="18" name="">
             <a:extLst xmlns:a="http://schemas.openxmlformats.org/drawingml/2006/main">
               <a:ext uri="{FF2B5EF4-FFF2-40B4-BE49-F238E27FC236}">
-                <a16:creationId xmlns:a16="http://schemas.microsoft.com/office/drawing/2014/main" id="{51598E2B-8A61-42B5-BF9D-A75BAA8DB0CC}"/>
-              </a:ext>
-            </a:extLst>
-          </p:cNvPr>
-          <p:cNvSpPr>
-            <a:spLocks xmlns:a="http://schemas.openxmlformats.org/drawingml/2006/main" noGrp="1"/>
-          </p:cNvSpPr>
-          <p:nvPr/>
-        </p:nvSpPr>
-        <p:spPr>
-          <a:xfrm xmlns:a="http://schemas.openxmlformats.org/drawingml/2006/main">
-            <a:off x="1000125" y="3762375"/>
-            <a:ext cx="476250" cy="419100"/>
+                <a16:creationId xmlns:a16="http://schemas.microsoft.com/office/drawing/2014/main" id="{7E0FE4A4-6413-40BC-8667-DEDBCD4993CF}"/>
+              </a:ext>
+            </a:extLst>
+          </p:cNvPr>
+          <p:cNvSpPr>
+            <a:spLocks xmlns:a="http://schemas.openxmlformats.org/drawingml/2006/main" noGrp="1"/>
+          </p:cNvSpPr>
+          <p:nvPr/>
+        </p:nvSpPr>
+        <p:spPr>
+          <a:xfrm xmlns:a="http://schemas.openxmlformats.org/drawingml/2006/main">
+            <a:off x="1162050" y="3609975"/>
+            <a:ext cx="400050" cy="400050"/>
           </a:xfrm>
           <a:prstGeom xmlns:a="http://schemas.openxmlformats.org/drawingml/2006/main" prst="rect">
             <a:avLst/>
@@ -8614,9 +8620,9 @@
           <a:lstStyle xmlns:a="http://schemas.openxmlformats.org/drawingml/2006/main"/>
           <a:p xmlns:a="http://schemas.openxmlformats.org/drawingml/2006/main">
             <a:pPr algn="ctr">
-              <a:defRPr sz="1350" b="1">
-                <a:solidFill>
-                  <a:srgbClr val="FFFFFF"/>
+              <a:defRPr sz="1125" b="1">
+                <a:solidFill>
+                  <a:srgbClr val="2C6E73"/>
                 </a:solidFill>
                 <a:latin typeface="Arial"/>
                 <a:ea typeface="Arial"/>
@@ -8624,9 +8630,9 @@
               </a:defRPr>
             </a:pPr>
             <a:r>
-              <a:rPr sz="1350" b="1">
-                <a:solidFill>
-                  <a:srgbClr val="FFFFFF"/>
+              <a:rPr sz="1125" b="1">
+                <a:solidFill>
+                  <a:srgbClr val="2C6E73"/>
                 </a:solidFill>
                 <a:latin typeface="Arial"/>
                 <a:ea typeface="Arial"/>
@@ -8642,19 +8648,19 @@
           <p:cNvPr id="19" name="">
             <a:extLst xmlns:a="http://schemas.openxmlformats.org/drawingml/2006/main">
               <a:ext uri="{FF2B5EF4-FFF2-40B4-BE49-F238E27FC236}">
-                <a16:creationId xmlns:a16="http://schemas.microsoft.com/office/drawing/2014/main" id="{242E4B5D-1A97-4AA5-AA4D-D315955782A5}"/>
-              </a:ext>
-            </a:extLst>
-          </p:cNvPr>
-          <p:cNvSpPr>
-            <a:spLocks xmlns:a="http://schemas.openxmlformats.org/drawingml/2006/main" noGrp="1"/>
-          </p:cNvSpPr>
-          <p:nvPr/>
-        </p:nvSpPr>
-        <p:spPr>
-          <a:xfrm xmlns:a="http://schemas.openxmlformats.org/drawingml/2006/main">
-            <a:off x="1714500" y="3667125"/>
-            <a:ext cx="9429750" cy="609600"/>
+                <a16:creationId xmlns:a16="http://schemas.microsoft.com/office/drawing/2014/main" id="{1B547440-FCC7-40AE-ADA4-EE4344E34038}"/>
+              </a:ext>
+            </a:extLst>
+          </p:cNvPr>
+          <p:cNvSpPr>
+            <a:spLocks xmlns:a="http://schemas.openxmlformats.org/drawingml/2006/main" noGrp="1"/>
+          </p:cNvSpPr>
+          <p:nvPr/>
+        </p:nvSpPr>
+        <p:spPr>
+          <a:xfrm xmlns:a="http://schemas.openxmlformats.org/drawingml/2006/main">
+            <a:off x="1714500" y="3524250"/>
+            <a:ext cx="9525000" cy="638175"/>
           </a:xfrm>
           <a:prstGeom xmlns:a="http://schemas.openxmlformats.org/drawingml/2006/main" prst="rect">
             <a:avLst/>
@@ -8671,7 +8677,7 @@
           <a:lstStyle xmlns:a="http://schemas.openxmlformats.org/drawingml/2006/main"/>
           <a:p xmlns:a="http://schemas.openxmlformats.org/drawingml/2006/main">
             <a:pPr algn="l">
-              <a:defRPr sz="1500" b="0">
+              <a:defRPr sz="1575" b="0">
                 <a:solidFill>
                   <a:srgbClr val="17253A"/>
                 </a:solidFill>
@@ -8681,7 +8687,7 @@
               </a:defRPr>
             </a:pPr>
             <a:r>
-              <a:rPr sz="1500" b="0">
+              <a:rPr sz="1575" b="0">
                 <a:solidFill>
                   <a:srgbClr val="17253A"/>
                 </a:solidFill>
@@ -8689,7 +8695,7 @@
                 <a:ea typeface="Arial"/>
                 <a:cs typeface="Arial"/>
               </a:rPr>
-              <a:t>Complete the calculation: 31.</a:t>
+              <a:t>A = 3 × 7 + 2 × 5</a:t>
             </a:r>
           </a:p>
         </p:txBody>
@@ -8699,28 +8705,30 @@
           <p:cNvPr id="20" name="">
             <a:extLst xmlns:a="http://schemas.openxmlformats.org/drawingml/2006/main">
               <a:ext uri="{FF2B5EF4-FFF2-40B4-BE49-F238E27FC236}">
-                <a16:creationId xmlns:a16="http://schemas.microsoft.com/office/drawing/2014/main" id="{DBFA8818-889A-4728-94F6-73E7C5ACF07C}"/>
-              </a:ext>
-            </a:extLst>
-          </p:cNvPr>
-          <p:cNvSpPr>
-            <a:spLocks xmlns:a="http://schemas.openxmlformats.org/drawingml/2006/main" noGrp="1"/>
-          </p:cNvSpPr>
-          <p:nvPr/>
-        </p:nvSpPr>
-        <p:spPr>
-          <a:xfrm xmlns:a="http://schemas.openxmlformats.org/drawingml/2006/main">
-            <a:off x="1000125" y="4476750"/>
-            <a:ext cx="476250" cy="476250"/>
-          </a:xfrm>
-          <a:prstGeom xmlns:a="http://schemas.openxmlformats.org/drawingml/2006/main" prst="ellipse">
+                <a16:creationId xmlns:a16="http://schemas.microsoft.com/office/drawing/2014/main" id="{5BA14FCA-FFE8-46AA-9172-A17F98F63E47}"/>
+              </a:ext>
+            </a:extLst>
+          </p:cNvPr>
+          <p:cNvSpPr>
+            <a:spLocks xmlns:a="http://schemas.openxmlformats.org/drawingml/2006/main" noGrp="1"/>
+          </p:cNvSpPr>
+          <p:nvPr/>
+        </p:nvSpPr>
+        <p:spPr>
+          <a:xfrm xmlns:a="http://schemas.openxmlformats.org/drawingml/2006/main">
+            <a:off x="1714500" y="4181475"/>
+            <a:ext cx="9334500" cy="9525"/>
+          </a:xfrm>
+          <a:prstGeom xmlns:a="http://schemas.openxmlformats.org/drawingml/2006/main" prst="rect">
             <a:avLst/>
           </a:prstGeom>
           <a:solidFill xmlns:a="http://schemas.openxmlformats.org/drawingml/2006/main">
-            <a:srgbClr val="2C6E73"/>
+            <a:srgbClr val="D9E0E6"/>
           </a:solidFill>
           <a:ln xmlns:a="http://schemas.openxmlformats.org/drawingml/2006/main" w="0">
-            <a:noFill/>
+            <a:solidFill>
+              <a:srgbClr val="D9E0E6"/>
+            </a:solidFill>
           </a:ln>
         </p:spPr>
       </p:sp>
@@ -8729,19 +8737,19 @@
           <p:cNvPr id="21" name="">
             <a:extLst xmlns:a="http://schemas.openxmlformats.org/drawingml/2006/main">
               <a:ext uri="{FF2B5EF4-FFF2-40B4-BE49-F238E27FC236}">
-                <a16:creationId xmlns:a16="http://schemas.microsoft.com/office/drawing/2014/main" id="{8A85AA63-28E8-43D2-A080-29B19BDC4F34}"/>
-              </a:ext>
-            </a:extLst>
-          </p:cNvPr>
-          <p:cNvSpPr>
-            <a:spLocks xmlns:a="http://schemas.openxmlformats.org/drawingml/2006/main" noGrp="1"/>
-          </p:cNvSpPr>
-          <p:nvPr/>
-        </p:nvSpPr>
-        <p:spPr>
-          <a:xfrm xmlns:a="http://schemas.openxmlformats.org/drawingml/2006/main">
-            <a:off x="1000125" y="4505325"/>
-            <a:ext cx="476250" cy="419100"/>
+                <a16:creationId xmlns:a16="http://schemas.microsoft.com/office/drawing/2014/main" id="{1C13AC69-4937-4108-BED1-F5F8B89638AE}"/>
+              </a:ext>
+            </a:extLst>
+          </p:cNvPr>
+          <p:cNvSpPr>
+            <a:spLocks xmlns:a="http://schemas.openxmlformats.org/drawingml/2006/main" noGrp="1"/>
+          </p:cNvSpPr>
+          <p:nvPr/>
+        </p:nvSpPr>
+        <p:spPr>
+          <a:xfrm xmlns:a="http://schemas.openxmlformats.org/drawingml/2006/main">
+            <a:off x="1162050" y="4314825"/>
+            <a:ext cx="400050" cy="400050"/>
           </a:xfrm>
           <a:prstGeom xmlns:a="http://schemas.openxmlformats.org/drawingml/2006/main" prst="rect">
             <a:avLst/>
@@ -8758,9 +8766,9 @@
           <a:lstStyle xmlns:a="http://schemas.openxmlformats.org/drawingml/2006/main"/>
           <a:p xmlns:a="http://schemas.openxmlformats.org/drawingml/2006/main">
             <a:pPr algn="ctr">
-              <a:defRPr sz="1350" b="1">
-                <a:solidFill>
-                  <a:srgbClr val="FFFFFF"/>
+              <a:defRPr sz="1125" b="1">
+                <a:solidFill>
+                  <a:srgbClr val="2C6E73"/>
                 </a:solidFill>
                 <a:latin typeface="Arial"/>
                 <a:ea typeface="Arial"/>
@@ -8768,9 +8776,9 @@
               </a:defRPr>
             </a:pPr>
             <a:r>
-              <a:rPr sz="1350" b="1">
-                <a:solidFill>
-                  <a:srgbClr val="FFFFFF"/>
+              <a:rPr sz="1125" b="1">
+                <a:solidFill>
+                  <a:srgbClr val="2C6E73"/>
                 </a:solidFill>
                 <a:latin typeface="Arial"/>
                 <a:ea typeface="Arial"/>
@@ -8786,19 +8794,19 @@
           <p:cNvPr id="22" name="">
             <a:extLst xmlns:a="http://schemas.openxmlformats.org/drawingml/2006/main">
               <a:ext uri="{FF2B5EF4-FFF2-40B4-BE49-F238E27FC236}">
-                <a16:creationId xmlns:a16="http://schemas.microsoft.com/office/drawing/2014/main" id="{E61A38E7-C9F5-4426-A04E-1B8B0631C2F6}"/>
-              </a:ext>
-            </a:extLst>
-          </p:cNvPr>
-          <p:cNvSpPr>
-            <a:spLocks xmlns:a="http://schemas.openxmlformats.org/drawingml/2006/main" noGrp="1"/>
-          </p:cNvSpPr>
-          <p:nvPr/>
-        </p:nvSpPr>
-        <p:spPr>
-          <a:xfrm xmlns:a="http://schemas.openxmlformats.org/drawingml/2006/main">
-            <a:off x="1714500" y="4410075"/>
-            <a:ext cx="9429750" cy="609600"/>
+                <a16:creationId xmlns:a16="http://schemas.microsoft.com/office/drawing/2014/main" id="{E8AB482E-66D7-4523-95AB-FD693A5A1D82}"/>
+              </a:ext>
+            </a:extLst>
+          </p:cNvPr>
+          <p:cNvSpPr>
+            <a:spLocks xmlns:a="http://schemas.openxmlformats.org/drawingml/2006/main" noGrp="1"/>
+          </p:cNvSpPr>
+          <p:nvPr/>
+        </p:nvSpPr>
+        <p:spPr>
+          <a:xfrm xmlns:a="http://schemas.openxmlformats.org/drawingml/2006/main">
+            <a:off x="1714500" y="4229100"/>
+            <a:ext cx="9525000" cy="638175"/>
           </a:xfrm>
           <a:prstGeom xmlns:a="http://schemas.openxmlformats.org/drawingml/2006/main" prst="rect">
             <a:avLst/>
@@ -8815,9 +8823,9 @@
           <a:lstStyle xmlns:a="http://schemas.openxmlformats.org/drawingml/2006/main"/>
           <a:p xmlns:a="http://schemas.openxmlformats.org/drawingml/2006/main">
             <a:pPr algn="l">
-              <a:defRPr sz="1500" b="1">
-                <a:solidFill>
-                  <a:srgbClr val="2F785D"/>
+              <a:defRPr sz="1575" b="0">
+                <a:solidFill>
+                  <a:srgbClr val="17253A"/>
                 </a:solidFill>
                 <a:latin typeface="Arial"/>
                 <a:ea typeface="Arial"/>
@@ -8825,15 +8833,161 @@
               </a:defRPr>
             </a:pPr>
             <a:r>
-              <a:rPr sz="1500" b="1">
+              <a:rPr sz="1575" b="0">
+                <a:solidFill>
+                  <a:srgbClr val="17253A"/>
+                </a:solidFill>
+                <a:latin typeface="Arial"/>
+                <a:ea typeface="Arial"/>
+                <a:cs typeface="Arial"/>
+              </a:rPr>
+              <a:t>A = 21 + 10</a:t>
+            </a:r>
+          </a:p>
+        </p:txBody>
+      </p:sp>
+      <p:sp>
+        <p:nvSpPr>
+          <p:cNvPr id="23" name="">
+            <a:extLst xmlns:a="http://schemas.openxmlformats.org/drawingml/2006/main">
+              <a:ext uri="{FF2B5EF4-FFF2-40B4-BE49-F238E27FC236}">
+                <a16:creationId xmlns:a16="http://schemas.microsoft.com/office/drawing/2014/main" id="{EAE5C733-E834-419A-BC1D-C370291A657B}"/>
+              </a:ext>
+            </a:extLst>
+          </p:cNvPr>
+          <p:cNvSpPr>
+            <a:spLocks xmlns:a="http://schemas.openxmlformats.org/drawingml/2006/main" noGrp="1"/>
+          </p:cNvSpPr>
+          <p:nvPr/>
+        </p:nvSpPr>
+        <p:spPr>
+          <a:xfrm xmlns:a="http://schemas.openxmlformats.org/drawingml/2006/main">
+            <a:off x="1714500" y="4886325"/>
+            <a:ext cx="9334500" cy="9525"/>
+          </a:xfrm>
+          <a:prstGeom xmlns:a="http://schemas.openxmlformats.org/drawingml/2006/main" prst="rect">
+            <a:avLst/>
+          </a:prstGeom>
+          <a:solidFill xmlns:a="http://schemas.openxmlformats.org/drawingml/2006/main">
+            <a:srgbClr val="D9E0E6"/>
+          </a:solidFill>
+          <a:ln xmlns:a="http://schemas.openxmlformats.org/drawingml/2006/main" w="0">
+            <a:solidFill>
+              <a:srgbClr val="D9E0E6"/>
+            </a:solidFill>
+          </a:ln>
+        </p:spPr>
+      </p:sp>
+      <p:sp>
+        <p:nvSpPr>
+          <p:cNvPr id="24" name="">
+            <a:extLst xmlns:a="http://schemas.openxmlformats.org/drawingml/2006/main">
+              <a:ext uri="{FF2B5EF4-FFF2-40B4-BE49-F238E27FC236}">
+                <a16:creationId xmlns:a16="http://schemas.microsoft.com/office/drawing/2014/main" id="{481C3CCB-494C-492E-9A1F-C865B6ECAC39}"/>
+              </a:ext>
+            </a:extLst>
+          </p:cNvPr>
+          <p:cNvSpPr>
+            <a:spLocks xmlns:a="http://schemas.openxmlformats.org/drawingml/2006/main" noGrp="1"/>
+          </p:cNvSpPr>
+          <p:nvPr/>
+        </p:nvSpPr>
+        <p:spPr>
+          <a:xfrm xmlns:a="http://schemas.openxmlformats.org/drawingml/2006/main">
+            <a:off x="1162050" y="5019675"/>
+            <a:ext cx="400050" cy="400050"/>
+          </a:xfrm>
+          <a:prstGeom xmlns:a="http://schemas.openxmlformats.org/drawingml/2006/main" prst="rect">
+            <a:avLst/>
+          </a:prstGeom>
+          <a:noFill xmlns:a="http://schemas.openxmlformats.org/drawingml/2006/main"/>
+          <a:ln xmlns:a="http://schemas.openxmlformats.org/drawingml/2006/main" w="0">
+            <a:noFill/>
+          </a:ln>
+        </p:spPr>
+        <p:txBody>
+          <a:bodyPr xmlns:a="http://schemas.openxmlformats.org/drawingml/2006/main" anchor="ctr">
+            <a:normAutofit fontScale="100000"/>
+          </a:bodyPr>
+          <a:lstStyle xmlns:a="http://schemas.openxmlformats.org/drawingml/2006/main"/>
+          <a:p xmlns:a="http://schemas.openxmlformats.org/drawingml/2006/main">
+            <a:pPr algn="ctr">
+              <a:defRPr sz="1125" b="1">
                 <a:solidFill>
                   <a:srgbClr val="2F785D"/>
                 </a:solidFill>
                 <a:latin typeface="Arial"/>
                 <a:ea typeface="Arial"/>
                 <a:cs typeface="Arial"/>
+              </a:defRPr>
+            </a:pPr>
+            <a:r>
+              <a:rPr sz="1125" b="1">
+                <a:solidFill>
+                  <a:srgbClr val="2F785D"/>
+                </a:solidFill>
+                <a:latin typeface="Arial"/>
+                <a:ea typeface="Arial"/>
+                <a:cs typeface="Arial"/>
               </a:rPr>
-              <a:t>Check the result: Substitute carefully and check against known terms.</a:t>
+              <a:t>5</a:t>
+            </a:r>
+          </a:p>
+        </p:txBody>
+      </p:sp>
+      <p:sp>
+        <p:nvSpPr>
+          <p:cNvPr id="25" name="">
+            <a:extLst xmlns:a="http://schemas.openxmlformats.org/drawingml/2006/main">
+              <a:ext uri="{FF2B5EF4-FFF2-40B4-BE49-F238E27FC236}">
+                <a16:creationId xmlns:a16="http://schemas.microsoft.com/office/drawing/2014/main" id="{5443236C-E78B-447F-A386-E255883858A7}"/>
+              </a:ext>
+            </a:extLst>
+          </p:cNvPr>
+          <p:cNvSpPr>
+            <a:spLocks xmlns:a="http://schemas.openxmlformats.org/drawingml/2006/main" noGrp="1"/>
+          </p:cNvSpPr>
+          <p:nvPr/>
+        </p:nvSpPr>
+        <p:spPr>
+          <a:xfrm xmlns:a="http://schemas.openxmlformats.org/drawingml/2006/main">
+            <a:off x="1714500" y="4933950"/>
+            <a:ext cx="9525000" cy="638175"/>
+          </a:xfrm>
+          <a:prstGeom xmlns:a="http://schemas.openxmlformats.org/drawingml/2006/main" prst="rect">
+            <a:avLst/>
+          </a:prstGeom>
+          <a:noFill xmlns:a="http://schemas.openxmlformats.org/drawingml/2006/main"/>
+          <a:ln xmlns:a="http://schemas.openxmlformats.org/drawingml/2006/main" w="0">
+            <a:noFill/>
+          </a:ln>
+        </p:spPr>
+        <p:txBody>
+          <a:bodyPr xmlns:a="http://schemas.openxmlformats.org/drawingml/2006/main" anchor="ctr">
+            <a:normAutofit fontScale="100000"/>
+          </a:bodyPr>
+          <a:lstStyle xmlns:a="http://schemas.openxmlformats.org/drawingml/2006/main"/>
+          <a:p xmlns:a="http://schemas.openxmlformats.org/drawingml/2006/main">
+            <a:pPr algn="l">
+              <a:defRPr sz="1575" b="1">
+                <a:solidFill>
+                  <a:srgbClr val="2F785D"/>
+                </a:solidFill>
+                <a:latin typeface="Arial"/>
+                <a:ea typeface="Arial"/>
+                <a:cs typeface="Arial"/>
+              </a:defRPr>
+            </a:pPr>
+            <a:r>
+              <a:rPr sz="1575" b="1">
+                <a:solidFill>
+                  <a:srgbClr val="2F785D"/>
+                </a:solidFill>
+                <a:latin typeface="Arial"/>
+                <a:ea typeface="Arial"/>
+                <a:cs typeface="Arial"/>
+              </a:rPr>
+              <a:t>A = 31</a:t>
             </a:r>
           </a:p>
         </p:txBody>
@@ -8841,7 +8995,7 @@
     </p:spTree>
     <p:extLst>
       <p:ext uri="{BB962C8B-B14F-4D97-AF65-F5344CB8AC3E}">
-        <p14:creationId xmlns:p14="http://schemas.microsoft.com/office/powerpoint/2010/main" val="1532687760"/>
+        <p14:creationId xmlns:p14="http://schemas.microsoft.com/office/powerpoint/2010/main" val="1877257188"/>
       </p:ext>
     </p:extLst>
   </p:cSld>
@@ -9078,6 +9232,51 @@
                       </p:childTnLst>
                     </p:cTn>
                   </p:par>
+                  <p:par>
+                    <p:cTn id="23" fill="hold">
+                      <p:stCondLst>
+                        <p:cond delay="indefinite"/>
+                      </p:stCondLst>
+                      <p:childTnLst>
+                        <p:par>
+                          <p:cTn id="24" fill="hold">
+                            <p:stCondLst>
+                              <p:cond delay="0"/>
+                            </p:stCondLst>
+                            <p:childTnLst>
+                              <p:par>
+                                <p:cTn id="25" presetID="1" presetClass="entr" presetSubtype="0" fill="hold" grpId="0" nodeType="clickEffect">
+                                  <p:stCondLst>
+                                    <p:cond delay="0"/>
+                                  </p:stCondLst>
+                                  <p:childTnLst>
+                                    <p:set>
+                                      <p:cBhvr>
+                                        <p:cTn id="26" dur="1" fill="hold">
+                                          <p:stCondLst>
+                                            <p:cond delay="0"/>
+                                          </p:stCondLst>
+                                        </p:cTn>
+                                        <p:tgtEl>
+                                          <p:spTgt spid="25"/>
+                                        </p:tgtEl>
+                                        <p:attrNameLst>
+                                          <p:attrName>style.visibility</p:attrName>
+                                        </p:attrNameLst>
+                                      </p:cBhvr>
+                                      <p:to>
+                                        <p:strVal val="visible"/>
+                                      </p:to>
+                                    </p:set>
+                                  </p:childTnLst>
+                                </p:cTn>
+                              </p:par>
+                            </p:childTnLst>
+                          </p:cTn>
+                        </p:par>
+                      </p:childTnLst>
+                    </p:cTn>
+                  </p:par>
                 </p:childTnLst>
               </p:cTn>
               <p:prevCondLst>
@@ -9105,6 +9304,7 @@
       <p:bldP spid="16" grpId="0"/>
       <p:bldP spid="19" grpId="0"/>
       <p:bldP spid="22" grpId="0"/>
+      <p:bldP spid="25" grpId="0"/>
     </p:bldLst>
   </p:timing>
 </p:sld>
@@ -9134,7 +9334,7 @@
           <p:cNvPr id="15" name="">
             <a:extLst xmlns:a="http://schemas.openxmlformats.org/drawingml/2006/main">
               <a:ext uri="{FF2B5EF4-FFF2-40B4-BE49-F238E27FC236}">
-                <a16:creationId xmlns:a16="http://schemas.microsoft.com/office/drawing/2014/main" id="{12EB8B82-E330-40AD-83BA-9225EC39858F}"/>
+                <a16:creationId xmlns:a16="http://schemas.microsoft.com/office/drawing/2014/main" id="{AB9DFAE8-E336-41B9-AA12-B150A7A5ACDC}"/>
               </a:ext>
             </a:extLst>
           </p:cNvPr>
@@ -9166,7 +9366,7 @@
           <p:cNvPr id="2" name="">
             <a:extLst xmlns:a="http://schemas.openxmlformats.org/drawingml/2006/main">
               <a:ext uri="{FF2B5EF4-FFF2-40B4-BE49-F238E27FC236}">
-                <a16:creationId xmlns:a16="http://schemas.microsoft.com/office/drawing/2014/main" id="{035A932D-305C-4212-9C51-8BD641E16362}"/>
+                <a16:creationId xmlns:a16="http://schemas.microsoft.com/office/drawing/2014/main" id="{6ED9381F-1A4E-42A6-A158-35A3D9DE793D}"/>
               </a:ext>
             </a:extLst>
           </p:cNvPr>
@@ -9223,7 +9423,7 @@
           <p:cNvPr id="3" name="">
             <a:extLst xmlns:a="http://schemas.openxmlformats.org/drawingml/2006/main">
               <a:ext uri="{FF2B5EF4-FFF2-40B4-BE49-F238E27FC236}">
-                <a16:creationId xmlns:a16="http://schemas.microsoft.com/office/drawing/2014/main" id="{2545938C-5C11-4451-A353-4E4308B443B4}"/>
+                <a16:creationId xmlns:a16="http://schemas.microsoft.com/office/drawing/2014/main" id="{DACC284D-7106-4631-B33B-014600A634D6}"/>
               </a:ext>
             </a:extLst>
           </p:cNvPr>
@@ -9255,7 +9455,7 @@
           <p:cNvPr id="4" name="">
             <a:extLst xmlns:a="http://schemas.openxmlformats.org/drawingml/2006/main">
               <a:ext uri="{FF2B5EF4-FFF2-40B4-BE49-F238E27FC236}">
-                <a16:creationId xmlns:a16="http://schemas.microsoft.com/office/drawing/2014/main" id="{9DB1A117-1204-4C19-ADC7-92F8AFEADFF3}"/>
+                <a16:creationId xmlns:a16="http://schemas.microsoft.com/office/drawing/2014/main" id="{8D9A6BDB-4088-46CE-A6D2-28EA7C4587CB}"/>
               </a:ext>
             </a:extLst>
           </p:cNvPr>
@@ -9312,7 +9512,7 @@
           <p:cNvPr id="5" name="">
             <a:extLst xmlns:a="http://schemas.openxmlformats.org/drawingml/2006/main">
               <a:ext uri="{FF2B5EF4-FFF2-40B4-BE49-F238E27FC236}">
-                <a16:creationId xmlns:a16="http://schemas.microsoft.com/office/drawing/2014/main" id="{77DB99CC-0B8A-4E6D-95BF-868B242F48F2}"/>
+                <a16:creationId xmlns:a16="http://schemas.microsoft.com/office/drawing/2014/main" id="{527126A8-5413-4CDA-8343-5FBED6AE79E4}"/>
               </a:ext>
             </a:extLst>
           </p:cNvPr>
@@ -9369,7 +9569,7 @@
           <p:cNvPr id="6" name="">
             <a:extLst xmlns:a="http://schemas.openxmlformats.org/drawingml/2006/main">
               <a:ext uri="{FF2B5EF4-FFF2-40B4-BE49-F238E27FC236}">
-                <a16:creationId xmlns:a16="http://schemas.microsoft.com/office/drawing/2014/main" id="{A05D843F-509F-43EA-9556-304330604FB7}"/>
+                <a16:creationId xmlns:a16="http://schemas.microsoft.com/office/drawing/2014/main" id="{A3D64182-9124-4E5D-B684-9D9EADA84D59}"/>
               </a:ext>
             </a:extLst>
           </p:cNvPr>
@@ -9426,7 +9626,7 @@
           <p:cNvPr id="7" name="">
             <a:extLst xmlns:a="http://schemas.openxmlformats.org/drawingml/2006/main">
               <a:ext uri="{FF2B5EF4-FFF2-40B4-BE49-F238E27FC236}">
-                <a16:creationId xmlns:a16="http://schemas.microsoft.com/office/drawing/2014/main" id="{11252C33-8310-4D8B-AC36-FB0BC659CD05}"/>
+                <a16:creationId xmlns:a16="http://schemas.microsoft.com/office/drawing/2014/main" id="{CBD60543-6752-4094-8AA6-089A4511FC6F}"/>
               </a:ext>
             </a:extLst>
           </p:cNvPr>
@@ -9458,7 +9658,7 @@
           <p:cNvPr id="8" name="">
             <a:extLst xmlns:a="http://schemas.openxmlformats.org/drawingml/2006/main">
               <a:ext uri="{FF2B5EF4-FFF2-40B4-BE49-F238E27FC236}">
-                <a16:creationId xmlns:a16="http://schemas.microsoft.com/office/drawing/2014/main" id="{10C07DBA-9BC9-4702-9475-C2EE19749690}"/>
+                <a16:creationId xmlns:a16="http://schemas.microsoft.com/office/drawing/2014/main" id="{DCA8022B-1FFA-4FDB-A69B-F119320845C9}"/>
               </a:ext>
             </a:extLst>
           </p:cNvPr>
@@ -9515,7 +9715,7 @@
           <p:cNvPr id="9" name="">
             <a:extLst xmlns:a="http://schemas.openxmlformats.org/drawingml/2006/main">
               <a:ext uri="{FF2B5EF4-FFF2-40B4-BE49-F238E27FC236}">
-                <a16:creationId xmlns:a16="http://schemas.microsoft.com/office/drawing/2014/main" id="{F99636E0-92CB-4B7A-9F54-38DD5084E57D}"/>
+                <a16:creationId xmlns:a16="http://schemas.microsoft.com/office/drawing/2014/main" id="{F22B8B04-DAC4-4D0E-B156-579DE90FE908}"/>
               </a:ext>
             </a:extLst>
           </p:cNvPr>
@@ -9572,7 +9772,7 @@
           <p:cNvPr id="10" name="">
             <a:extLst xmlns:a="http://schemas.openxmlformats.org/drawingml/2006/main">
               <a:ext uri="{FF2B5EF4-FFF2-40B4-BE49-F238E27FC236}">
-                <a16:creationId xmlns:a16="http://schemas.microsoft.com/office/drawing/2014/main" id="{3C91A17B-9728-4F3D-A915-DE0E7C1D7E03}"/>
+                <a16:creationId xmlns:a16="http://schemas.microsoft.com/office/drawing/2014/main" id="{476784FB-CC90-4AE8-A295-BEB4083D1343}"/>
               </a:ext>
             </a:extLst>
           </p:cNvPr>
@@ -9629,7 +9829,7 @@
           <p:cNvPr id="11" name="">
             <a:extLst xmlns:a="http://schemas.openxmlformats.org/drawingml/2006/main">
               <a:ext uri="{FF2B5EF4-FFF2-40B4-BE49-F238E27FC236}">
-                <a16:creationId xmlns:a16="http://schemas.microsoft.com/office/drawing/2014/main" id="{D656EE48-3BEB-4FD7-927F-B77D9ED9C2FB}"/>
+                <a16:creationId xmlns:a16="http://schemas.microsoft.com/office/drawing/2014/main" id="{C35E4CFA-523A-43D9-A13A-CA2F1FAFD8BC}"/>
               </a:ext>
             </a:extLst>
           </p:cNvPr>
@@ -9686,7 +9886,7 @@
           <p:cNvPr id="12" name="">
             <a:extLst xmlns:a="http://schemas.openxmlformats.org/drawingml/2006/main">
               <a:ext uri="{FF2B5EF4-FFF2-40B4-BE49-F238E27FC236}">
-                <a16:creationId xmlns:a16="http://schemas.microsoft.com/office/drawing/2014/main" id="{2B2F1869-8509-4842-8921-848537329780}"/>
+                <a16:creationId xmlns:a16="http://schemas.microsoft.com/office/drawing/2014/main" id="{477C7828-2F76-470A-9E0F-E994E0A190ED}"/>
               </a:ext>
             </a:extLst>
           </p:cNvPr>
@@ -9718,7 +9918,7 @@
           <p:cNvPr id="13" name="">
             <a:extLst xmlns:a="http://schemas.openxmlformats.org/drawingml/2006/main">
               <a:ext uri="{FF2B5EF4-FFF2-40B4-BE49-F238E27FC236}">
-                <a16:creationId xmlns:a16="http://schemas.microsoft.com/office/drawing/2014/main" id="{871F8A3E-0DC3-4E15-BC24-31FDFFA5DFAD}"/>
+                <a16:creationId xmlns:a16="http://schemas.microsoft.com/office/drawing/2014/main" id="{43D4D399-4586-42FA-87A2-4D2B55A2570F}"/>
               </a:ext>
             </a:extLst>
           </p:cNvPr>
@@ -9775,7 +9975,7 @@
           <p:cNvPr id="14" name="">
             <a:extLst xmlns:a="http://schemas.openxmlformats.org/drawingml/2006/main">
               <a:ext uri="{FF2B5EF4-FFF2-40B4-BE49-F238E27FC236}">
-                <a16:creationId xmlns:a16="http://schemas.microsoft.com/office/drawing/2014/main" id="{6A94FC0C-75BC-474A-B9D1-495F61EF5412}"/>
+                <a16:creationId xmlns:a16="http://schemas.microsoft.com/office/drawing/2014/main" id="{227B7E04-4BA5-4093-B379-B015785037B0}"/>
               </a:ext>
             </a:extLst>
           </p:cNvPr>
@@ -9830,7 +10030,7 @@
     </p:spTree>
     <p:extLst>
       <p:ext uri="{BB962C8B-B14F-4D97-AF65-F5344CB8AC3E}">
-        <p14:creationId xmlns:p14="http://schemas.microsoft.com/office/powerpoint/2010/main" val="846796542"/>
+        <p14:creationId xmlns:p14="http://schemas.microsoft.com/office/powerpoint/2010/main" val="2089679629"/>
       </p:ext>
     </p:extLst>
   </p:cSld>
@@ -10031,7 +10231,7 @@
           <p:cNvPr id="16" name="">
             <a:extLst xmlns:a="http://schemas.openxmlformats.org/drawingml/2006/main">
               <a:ext uri="{FF2B5EF4-FFF2-40B4-BE49-F238E27FC236}">
-                <a16:creationId xmlns:a16="http://schemas.microsoft.com/office/drawing/2014/main" id="{DB4DAED5-0946-4B28-8D8F-F7C3B3A1B664}"/>
+                <a16:creationId xmlns:a16="http://schemas.microsoft.com/office/drawing/2014/main" id="{76884387-DF4F-424C-A2BB-FC8700234E61}"/>
               </a:ext>
             </a:extLst>
           </p:cNvPr>
@@ -10063,7 +10263,7 @@
           <p:cNvPr id="2" name="">
             <a:extLst xmlns:a="http://schemas.openxmlformats.org/drawingml/2006/main">
               <a:ext uri="{FF2B5EF4-FFF2-40B4-BE49-F238E27FC236}">
-                <a16:creationId xmlns:a16="http://schemas.microsoft.com/office/drawing/2014/main" id="{70A54381-6B7C-4062-AFB7-64AA06D2D89E}"/>
+                <a16:creationId xmlns:a16="http://schemas.microsoft.com/office/drawing/2014/main" id="{65217998-CA00-474F-819E-676901844CF0}"/>
               </a:ext>
             </a:extLst>
           </p:cNvPr>
@@ -10120,7 +10320,7 @@
           <p:cNvPr id="3" name="">
             <a:extLst xmlns:a="http://schemas.openxmlformats.org/drawingml/2006/main">
               <a:ext uri="{FF2B5EF4-FFF2-40B4-BE49-F238E27FC236}">
-                <a16:creationId xmlns:a16="http://schemas.microsoft.com/office/drawing/2014/main" id="{1E14FE37-AE5C-42CA-BECF-B7BF0368F533}"/>
+                <a16:creationId xmlns:a16="http://schemas.microsoft.com/office/drawing/2014/main" id="{53CB31A7-876C-47EA-820A-FD6AC45577BF}"/>
               </a:ext>
             </a:extLst>
           </p:cNvPr>
@@ -10152,7 +10352,7 @@
           <p:cNvPr id="4" name="">
             <a:extLst xmlns:a="http://schemas.openxmlformats.org/drawingml/2006/main">
               <a:ext uri="{FF2B5EF4-FFF2-40B4-BE49-F238E27FC236}">
-                <a16:creationId xmlns:a16="http://schemas.microsoft.com/office/drawing/2014/main" id="{1415CAC8-BB76-4C7B-8F6E-621526F1CE9A}"/>
+                <a16:creationId xmlns:a16="http://schemas.microsoft.com/office/drawing/2014/main" id="{CC0EE1A9-91B9-453D-ABDC-9E70F5C975DB}"/>
               </a:ext>
             </a:extLst>
           </p:cNvPr>
@@ -10209,7 +10409,7 @@
           <p:cNvPr id="5" name="">
             <a:extLst xmlns:a="http://schemas.openxmlformats.org/drawingml/2006/main">
               <a:ext uri="{FF2B5EF4-FFF2-40B4-BE49-F238E27FC236}">
-                <a16:creationId xmlns:a16="http://schemas.microsoft.com/office/drawing/2014/main" id="{F36C28DC-4E51-4C06-8CD2-AA0303BE8B98}"/>
+                <a16:creationId xmlns:a16="http://schemas.microsoft.com/office/drawing/2014/main" id="{6E263A51-99D1-4318-A326-C915C6EE21AA}"/>
               </a:ext>
             </a:extLst>
           </p:cNvPr>
@@ -10266,7 +10466,7 @@
           <p:cNvPr id="6" name="">
             <a:extLst xmlns:a="http://schemas.openxmlformats.org/drawingml/2006/main">
               <a:ext uri="{FF2B5EF4-FFF2-40B4-BE49-F238E27FC236}">
-                <a16:creationId xmlns:a16="http://schemas.microsoft.com/office/drawing/2014/main" id="{65DC766A-DA9F-4CA2-A4AD-485B6F25889D}"/>
+                <a16:creationId xmlns:a16="http://schemas.microsoft.com/office/drawing/2014/main" id="{55892660-8A4C-477A-91D9-29130A8B11B1}"/>
               </a:ext>
             </a:extLst>
           </p:cNvPr>
@@ -10323,7 +10523,7 @@
           <p:cNvPr id="7" name="">
             <a:extLst xmlns:a="http://schemas.openxmlformats.org/drawingml/2006/main">
               <a:ext uri="{FF2B5EF4-FFF2-40B4-BE49-F238E27FC236}">
-                <a16:creationId xmlns:a16="http://schemas.microsoft.com/office/drawing/2014/main" id="{862EF27B-32F1-438E-9CA2-984CF45B89A5}"/>
+                <a16:creationId xmlns:a16="http://schemas.microsoft.com/office/drawing/2014/main" id="{E42EB1FF-C2CB-4442-9CB3-01AEC3A55AE2}"/>
               </a:ext>
             </a:extLst>
           </p:cNvPr>
@@ -10355,7 +10555,7 @@
           <p:cNvPr id="8" name="">
             <a:extLst xmlns:a="http://schemas.openxmlformats.org/drawingml/2006/main">
               <a:ext uri="{FF2B5EF4-FFF2-40B4-BE49-F238E27FC236}">
-                <a16:creationId xmlns:a16="http://schemas.microsoft.com/office/drawing/2014/main" id="{D208487F-D2E7-4AC6-AD43-0E3D5BDA54DF}"/>
+                <a16:creationId xmlns:a16="http://schemas.microsoft.com/office/drawing/2014/main" id="{FE540EC4-C2B9-4ACA-99C1-79AA5E5FF5CF}"/>
               </a:ext>
             </a:extLst>
           </p:cNvPr>
@@ -10412,7 +10612,7 @@
           <p:cNvPr id="9" name="">
             <a:extLst xmlns:a="http://schemas.openxmlformats.org/drawingml/2006/main">
               <a:ext uri="{FF2B5EF4-FFF2-40B4-BE49-F238E27FC236}">
-                <a16:creationId xmlns:a16="http://schemas.microsoft.com/office/drawing/2014/main" id="{DE880FB9-035A-4ABB-9199-E5E59CAF6AE1}"/>
+                <a16:creationId xmlns:a16="http://schemas.microsoft.com/office/drawing/2014/main" id="{276BC89B-24C1-4809-BE22-B5EE910356CF}"/>
               </a:ext>
             </a:extLst>
           </p:cNvPr>
@@ -10469,7 +10669,7 @@
           <p:cNvPr id="10" name="">
             <a:extLst xmlns:a="http://schemas.openxmlformats.org/drawingml/2006/main">
               <a:ext uri="{FF2B5EF4-FFF2-40B4-BE49-F238E27FC236}">
-                <a16:creationId xmlns:a16="http://schemas.microsoft.com/office/drawing/2014/main" id="{B2422BC6-D5B9-457C-A5AB-9BCC5D687AF5}"/>
+                <a16:creationId xmlns:a16="http://schemas.microsoft.com/office/drawing/2014/main" id="{09E7246B-7DE7-4788-9BB2-52687C59E697}"/>
               </a:ext>
             </a:extLst>
           </p:cNvPr>
@@ -10526,7 +10726,7 @@
           <p:cNvPr id="11" name="">
             <a:extLst xmlns:a="http://schemas.openxmlformats.org/drawingml/2006/main">
               <a:ext uri="{FF2B5EF4-FFF2-40B4-BE49-F238E27FC236}">
-                <a16:creationId xmlns:a16="http://schemas.microsoft.com/office/drawing/2014/main" id="{470C2BFB-2863-4763-B5BF-1F0FE5D178C3}"/>
+                <a16:creationId xmlns:a16="http://schemas.microsoft.com/office/drawing/2014/main" id="{2550ACAD-626A-40CB-ADCE-EBFE2B461515}"/>
               </a:ext>
             </a:extLst>
           </p:cNvPr>
@@ -10583,7 +10783,7 @@
           <p:cNvPr id="12" name="">
             <a:extLst xmlns:a="http://schemas.openxmlformats.org/drawingml/2006/main">
               <a:ext uri="{FF2B5EF4-FFF2-40B4-BE49-F238E27FC236}">
-                <a16:creationId xmlns:a16="http://schemas.microsoft.com/office/drawing/2014/main" id="{4CC56743-0334-4EA0-88F4-4196566DE4B3}"/>
+                <a16:creationId xmlns:a16="http://schemas.microsoft.com/office/drawing/2014/main" id="{826B05F8-50C2-40C8-ABFD-CF8B51163A60}"/>
               </a:ext>
             </a:extLst>
           </p:cNvPr>
@@ -10640,7 +10840,7 @@
           <p:cNvPr id="13" name="">
             <a:extLst xmlns:a="http://schemas.openxmlformats.org/drawingml/2006/main">
               <a:ext uri="{FF2B5EF4-FFF2-40B4-BE49-F238E27FC236}">
-                <a16:creationId xmlns:a16="http://schemas.microsoft.com/office/drawing/2014/main" id="{DAFF3180-DA06-4B7E-B528-938CC3A5AE3C}"/>
+                <a16:creationId xmlns:a16="http://schemas.microsoft.com/office/drawing/2014/main" id="{9144926C-65A9-4C98-AD7D-E6CF6DC2526B}"/>
               </a:ext>
             </a:extLst>
           </p:cNvPr>
@@ -10697,7 +10897,7 @@
           <p:cNvPr id="14" name="">
             <a:extLst xmlns:a="http://schemas.openxmlformats.org/drawingml/2006/main">
               <a:ext uri="{FF2B5EF4-FFF2-40B4-BE49-F238E27FC236}">
-                <a16:creationId xmlns:a16="http://schemas.microsoft.com/office/drawing/2014/main" id="{1C10C7ED-89A5-4E4D-83E9-299EA712A7A8}"/>
+                <a16:creationId xmlns:a16="http://schemas.microsoft.com/office/drawing/2014/main" id="{81FC4B86-0608-4F4E-9912-B26A8816D950}"/>
               </a:ext>
             </a:extLst>
           </p:cNvPr>
@@ -10754,7 +10954,7 @@
           <p:cNvPr id="15" name="">
             <a:extLst xmlns:a="http://schemas.openxmlformats.org/drawingml/2006/main">
               <a:ext uri="{FF2B5EF4-FFF2-40B4-BE49-F238E27FC236}">
-                <a16:creationId xmlns:a16="http://schemas.microsoft.com/office/drawing/2014/main" id="{3C194C4C-5BBC-4AF2-971D-B4D4802D0E28}"/>
+                <a16:creationId xmlns:a16="http://schemas.microsoft.com/office/drawing/2014/main" id="{51B45DFA-4755-40D7-B881-713BB5A5FA90}"/>
               </a:ext>
             </a:extLst>
           </p:cNvPr>
@@ -10809,7 +11009,7 @@
     </p:spTree>
     <p:extLst>
       <p:ext uri="{BB962C8B-B14F-4D97-AF65-F5344CB8AC3E}">
-        <p14:creationId xmlns:p14="http://schemas.microsoft.com/office/powerpoint/2010/main" val="873682"/>
+        <p14:creationId xmlns:p14="http://schemas.microsoft.com/office/powerpoint/2010/main" val="2007410888"/>
       </p:ext>
     </p:extLst>
   </p:cSld>
@@ -10964,7 +11164,7 @@
           <p:cNvPr id="16" name="">
             <a:extLst xmlns:a="http://schemas.openxmlformats.org/drawingml/2006/main">
               <a:ext uri="{FF2B5EF4-FFF2-40B4-BE49-F238E27FC236}">
-                <a16:creationId xmlns:a16="http://schemas.microsoft.com/office/drawing/2014/main" id="{12E9707D-B56E-4258-A4C4-6B3994AA681C}"/>
+                <a16:creationId xmlns:a16="http://schemas.microsoft.com/office/drawing/2014/main" id="{3821F9F5-82FA-441B-9598-F37CAF33DC17}"/>
               </a:ext>
             </a:extLst>
           </p:cNvPr>
@@ -10996,7 +11196,7 @@
           <p:cNvPr id="2" name="">
             <a:extLst xmlns:a="http://schemas.openxmlformats.org/drawingml/2006/main">
               <a:ext uri="{FF2B5EF4-FFF2-40B4-BE49-F238E27FC236}">
-                <a16:creationId xmlns:a16="http://schemas.microsoft.com/office/drawing/2014/main" id="{0A3F36FD-2A3F-4EA2-BE44-7B8A7E115CE2}"/>
+                <a16:creationId xmlns:a16="http://schemas.microsoft.com/office/drawing/2014/main" id="{8C3CBF6A-E698-4E69-B1A7-8FF5D4622915}"/>
               </a:ext>
             </a:extLst>
           </p:cNvPr>
@@ -11053,7 +11253,7 @@
           <p:cNvPr id="3" name="">
             <a:extLst xmlns:a="http://schemas.openxmlformats.org/drawingml/2006/main">
               <a:ext uri="{FF2B5EF4-FFF2-40B4-BE49-F238E27FC236}">
-                <a16:creationId xmlns:a16="http://schemas.microsoft.com/office/drawing/2014/main" id="{6C7E1BAF-EA95-433F-972D-199107BE35E4}"/>
+                <a16:creationId xmlns:a16="http://schemas.microsoft.com/office/drawing/2014/main" id="{4387CA31-F379-42B8-93B9-5526E9608AE2}"/>
               </a:ext>
             </a:extLst>
           </p:cNvPr>
@@ -11085,7 +11285,7 @@
           <p:cNvPr id="4" name="">
             <a:extLst xmlns:a="http://schemas.openxmlformats.org/drawingml/2006/main">
               <a:ext uri="{FF2B5EF4-FFF2-40B4-BE49-F238E27FC236}">
-                <a16:creationId xmlns:a16="http://schemas.microsoft.com/office/drawing/2014/main" id="{45BD1E15-30B8-45ED-88D5-2E48CE8C599B}"/>
+                <a16:creationId xmlns:a16="http://schemas.microsoft.com/office/drawing/2014/main" id="{44F58069-E3C5-4009-AAB5-90EFA293A899}"/>
               </a:ext>
             </a:extLst>
           </p:cNvPr>
@@ -11142,7 +11342,7 @@
           <p:cNvPr id="5" name="">
             <a:extLst xmlns:a="http://schemas.openxmlformats.org/drawingml/2006/main">
               <a:ext uri="{FF2B5EF4-FFF2-40B4-BE49-F238E27FC236}">
-                <a16:creationId xmlns:a16="http://schemas.microsoft.com/office/drawing/2014/main" id="{3CBA8DC9-F515-498D-877E-6973F886E73E}"/>
+                <a16:creationId xmlns:a16="http://schemas.microsoft.com/office/drawing/2014/main" id="{417991B5-D195-49E2-B23F-C95E3F87BFCC}"/>
               </a:ext>
             </a:extLst>
           </p:cNvPr>
@@ -11199,7 +11399,7 @@
           <p:cNvPr id="6" name="">
             <a:extLst xmlns:a="http://schemas.openxmlformats.org/drawingml/2006/main">
               <a:ext uri="{FF2B5EF4-FFF2-40B4-BE49-F238E27FC236}">
-                <a16:creationId xmlns:a16="http://schemas.microsoft.com/office/drawing/2014/main" id="{64434547-C04B-44C5-942F-AE1B103AC031}"/>
+                <a16:creationId xmlns:a16="http://schemas.microsoft.com/office/drawing/2014/main" id="{CA711CAF-4014-4564-ACDF-943768F25DC0}"/>
               </a:ext>
             </a:extLst>
           </p:cNvPr>
@@ -11256,7 +11456,7 @@
           <p:cNvPr id="7" name="">
             <a:extLst xmlns:a="http://schemas.openxmlformats.org/drawingml/2006/main">
               <a:ext uri="{FF2B5EF4-FFF2-40B4-BE49-F238E27FC236}">
-                <a16:creationId xmlns:a16="http://schemas.microsoft.com/office/drawing/2014/main" id="{17DD90D4-CD4E-4458-B319-9E3FBCB3ACF1}"/>
+                <a16:creationId xmlns:a16="http://schemas.microsoft.com/office/drawing/2014/main" id="{590A84DE-8C01-45F4-8DD8-85BDB484C026}"/>
               </a:ext>
             </a:extLst>
           </p:cNvPr>
@@ -11288,7 +11488,7 @@
           <p:cNvPr id="8" name="">
             <a:extLst xmlns:a="http://schemas.openxmlformats.org/drawingml/2006/main">
               <a:ext uri="{FF2B5EF4-FFF2-40B4-BE49-F238E27FC236}">
-                <a16:creationId xmlns:a16="http://schemas.microsoft.com/office/drawing/2014/main" id="{13FBE0E7-C1D3-48C7-B303-5038D43A15B2}"/>
+                <a16:creationId xmlns:a16="http://schemas.microsoft.com/office/drawing/2014/main" id="{8063CB8E-0889-460C-B62F-DD4086732928}"/>
               </a:ext>
             </a:extLst>
           </p:cNvPr>
@@ -11345,7 +11545,7 @@
           <p:cNvPr id="9" name="">
             <a:extLst xmlns:a="http://schemas.openxmlformats.org/drawingml/2006/main">
               <a:ext uri="{FF2B5EF4-FFF2-40B4-BE49-F238E27FC236}">
-                <a16:creationId xmlns:a16="http://schemas.microsoft.com/office/drawing/2014/main" id="{F860E5B5-71BB-4B0D-B60F-D5BCD4C07ECF}"/>
+                <a16:creationId xmlns:a16="http://schemas.microsoft.com/office/drawing/2014/main" id="{A97574F5-B804-4738-A4B3-5E9EC58DC1B8}"/>
               </a:ext>
             </a:extLst>
           </p:cNvPr>
@@ -11406,7 +11606,7 @@
           <p:nvPr/>
         </p:nvPicPr>
         <p:blipFill>
-          <a:blip xmlns:r="http://schemas.openxmlformats.org/officeDocument/2006/relationships" xmlns:a="http://schemas.openxmlformats.org/drawingml/2006/main" r:embed="R704f4c192c4340cb"/>
+          <a:blip xmlns:r="http://schemas.openxmlformats.org/officeDocument/2006/relationships" xmlns:a="http://schemas.openxmlformats.org/drawingml/2006/main" r:embed="Rc6502e67cd524bb7"/>
           <a:stretch xmlns:a="http://schemas.openxmlformats.org/drawingml/2006/main"/>
         </p:blipFill>
         <p:spPr>
@@ -11424,7 +11624,7 @@
           <p:cNvPr id="11" name="">
             <a:extLst xmlns:a="http://schemas.openxmlformats.org/drawingml/2006/main">
               <a:ext uri="{FF2B5EF4-FFF2-40B4-BE49-F238E27FC236}">
-                <a16:creationId xmlns:a16="http://schemas.microsoft.com/office/drawing/2014/main" id="{136DE8FF-09E5-4B7A-9B98-F81434252FE7}"/>
+                <a16:creationId xmlns:a16="http://schemas.microsoft.com/office/drawing/2014/main" id="{B98DCE7D-F79B-448A-A499-8FEC386E6D08}"/>
               </a:ext>
             </a:extLst>
           </p:cNvPr>
@@ -11481,7 +11681,7 @@
           <p:cNvPr id="12" name="">
             <a:extLst xmlns:a="http://schemas.openxmlformats.org/drawingml/2006/main">
               <a:ext uri="{FF2B5EF4-FFF2-40B4-BE49-F238E27FC236}">
-                <a16:creationId xmlns:a16="http://schemas.microsoft.com/office/drawing/2014/main" id="{D74300D6-3D80-47AB-87D5-580BC6CF3EBC}"/>
+                <a16:creationId xmlns:a16="http://schemas.microsoft.com/office/drawing/2014/main" id="{7FB3EAD2-7CDF-44D4-BFEF-D9F937FB2527}"/>
               </a:ext>
             </a:extLst>
           </p:cNvPr>
@@ -11538,7 +11738,7 @@
           <p:cNvPr id="13" name="">
             <a:extLst xmlns:a="http://schemas.openxmlformats.org/drawingml/2006/main">
               <a:ext uri="{FF2B5EF4-FFF2-40B4-BE49-F238E27FC236}">
-                <a16:creationId xmlns:a16="http://schemas.microsoft.com/office/drawing/2014/main" id="{998E247F-EA4A-41C1-B136-6C242304780A}"/>
+                <a16:creationId xmlns:a16="http://schemas.microsoft.com/office/drawing/2014/main" id="{90C66A6D-3114-43BD-BE10-00F16A2216B4}"/>
               </a:ext>
             </a:extLst>
           </p:cNvPr>
@@ -11570,7 +11770,7 @@
           <p:cNvPr id="14" name="">
             <a:extLst xmlns:a="http://schemas.openxmlformats.org/drawingml/2006/main">
               <a:ext uri="{FF2B5EF4-FFF2-40B4-BE49-F238E27FC236}">
-                <a16:creationId xmlns:a16="http://schemas.microsoft.com/office/drawing/2014/main" id="{6203BE70-41DE-4818-A0EF-EA4AA275C792}"/>
+                <a16:creationId xmlns:a16="http://schemas.microsoft.com/office/drawing/2014/main" id="{0298BCE1-FC92-4B38-A4A8-E5F600FC84D4}"/>
               </a:ext>
             </a:extLst>
           </p:cNvPr>
@@ -11627,7 +11827,7 @@
           <p:cNvPr id="15" name="">
             <a:extLst xmlns:a="http://schemas.openxmlformats.org/drawingml/2006/main">
               <a:ext uri="{FF2B5EF4-FFF2-40B4-BE49-F238E27FC236}">
-                <a16:creationId xmlns:a16="http://schemas.microsoft.com/office/drawing/2014/main" id="{D2BCAD0D-7B18-4AD2-814D-BA3E50D666F6}"/>
+                <a16:creationId xmlns:a16="http://schemas.microsoft.com/office/drawing/2014/main" id="{775B2433-96AC-4E31-AB71-B1273D51C8D5}"/>
               </a:ext>
             </a:extLst>
           </p:cNvPr>
@@ -11682,7 +11882,7 @@
     </p:spTree>
     <p:extLst>
       <p:ext uri="{BB962C8B-B14F-4D97-AF65-F5344CB8AC3E}">
-        <p14:creationId xmlns:p14="http://schemas.microsoft.com/office/powerpoint/2010/main" val="754335036"/>
+        <p14:creationId xmlns:p14="http://schemas.microsoft.com/office/powerpoint/2010/main" val="58794513"/>
       </p:ext>
     </p:extLst>
   </p:cSld>
@@ -11837,7 +12037,7 @@
           <p:cNvPr id="23" name="">
             <a:extLst xmlns:a="http://schemas.openxmlformats.org/drawingml/2006/main">
               <a:ext uri="{FF2B5EF4-FFF2-40B4-BE49-F238E27FC236}">
-                <a16:creationId xmlns:a16="http://schemas.microsoft.com/office/drawing/2014/main" id="{ECB1243E-32D2-4F7F-ABDD-8DAF70CF64B8}"/>
+                <a16:creationId xmlns:a16="http://schemas.microsoft.com/office/drawing/2014/main" id="{33796EC0-3D27-415C-A899-C683292FD4DC}"/>
               </a:ext>
             </a:extLst>
           </p:cNvPr>
@@ -11869,7 +12069,7 @@
           <p:cNvPr id="2" name="">
             <a:extLst xmlns:a="http://schemas.openxmlformats.org/drawingml/2006/main">
               <a:ext uri="{FF2B5EF4-FFF2-40B4-BE49-F238E27FC236}">
-                <a16:creationId xmlns:a16="http://schemas.microsoft.com/office/drawing/2014/main" id="{41178381-6052-424C-AEE3-EF786CCD609A}"/>
+                <a16:creationId xmlns:a16="http://schemas.microsoft.com/office/drawing/2014/main" id="{E0C8D92D-0A31-4BCF-A883-AB59934D9F13}"/>
               </a:ext>
             </a:extLst>
           </p:cNvPr>
@@ -11926,7 +12126,7 @@
           <p:cNvPr id="3" name="">
             <a:extLst xmlns:a="http://schemas.openxmlformats.org/drawingml/2006/main">
               <a:ext uri="{FF2B5EF4-FFF2-40B4-BE49-F238E27FC236}">
-                <a16:creationId xmlns:a16="http://schemas.microsoft.com/office/drawing/2014/main" id="{01D752CD-DD83-4CB3-A71E-29300B325BB4}"/>
+                <a16:creationId xmlns:a16="http://schemas.microsoft.com/office/drawing/2014/main" id="{A42B6BCA-C90E-4876-B04A-5358DEA021DE}"/>
               </a:ext>
             </a:extLst>
           </p:cNvPr>
@@ -11958,7 +12158,7 @@
           <p:cNvPr id="4" name="">
             <a:extLst xmlns:a="http://schemas.openxmlformats.org/drawingml/2006/main">
               <a:ext uri="{FF2B5EF4-FFF2-40B4-BE49-F238E27FC236}">
-                <a16:creationId xmlns:a16="http://schemas.microsoft.com/office/drawing/2014/main" id="{A7DBC262-0EB3-4053-B37B-18AD4A0F14FE}"/>
+                <a16:creationId xmlns:a16="http://schemas.microsoft.com/office/drawing/2014/main" id="{41770275-E141-4F8D-806E-4FE2EA8B731B}"/>
               </a:ext>
             </a:extLst>
           </p:cNvPr>
@@ -12015,7 +12215,7 @@
           <p:cNvPr id="5" name="">
             <a:extLst xmlns:a="http://schemas.openxmlformats.org/drawingml/2006/main">
               <a:ext uri="{FF2B5EF4-FFF2-40B4-BE49-F238E27FC236}">
-                <a16:creationId xmlns:a16="http://schemas.microsoft.com/office/drawing/2014/main" id="{50E10AD7-87F9-4168-8B34-85A021C9FC42}"/>
+                <a16:creationId xmlns:a16="http://schemas.microsoft.com/office/drawing/2014/main" id="{2D2D1A0D-09BE-42F6-A7E3-77BC8F787925}"/>
               </a:ext>
             </a:extLst>
           </p:cNvPr>
@@ -12072,7 +12272,7 @@
           <p:cNvPr id="6" name="">
             <a:extLst xmlns:a="http://schemas.openxmlformats.org/drawingml/2006/main">
               <a:ext uri="{FF2B5EF4-FFF2-40B4-BE49-F238E27FC236}">
-                <a16:creationId xmlns:a16="http://schemas.microsoft.com/office/drawing/2014/main" id="{C40E66B2-8E2D-4064-8507-C57184EF450D}"/>
+                <a16:creationId xmlns:a16="http://schemas.microsoft.com/office/drawing/2014/main" id="{94172440-D849-4C4D-A993-6C0EEF8683F7}"/>
               </a:ext>
             </a:extLst>
           </p:cNvPr>
@@ -12129,7 +12329,7 @@
           <p:cNvPr id="7" name="">
             <a:extLst xmlns:a="http://schemas.openxmlformats.org/drawingml/2006/main">
               <a:ext uri="{FF2B5EF4-FFF2-40B4-BE49-F238E27FC236}">
-                <a16:creationId xmlns:a16="http://schemas.microsoft.com/office/drawing/2014/main" id="{32320E37-7FEC-4AC8-B126-E2075E676DEC}"/>
+                <a16:creationId xmlns:a16="http://schemas.microsoft.com/office/drawing/2014/main" id="{F773359D-21D1-4D1B-9BBA-7634D54DA634}"/>
               </a:ext>
             </a:extLst>
           </p:cNvPr>
@@ -12161,7 +12361,7 @@
           <p:cNvPr id="8" name="">
             <a:extLst xmlns:a="http://schemas.openxmlformats.org/drawingml/2006/main">
               <a:ext uri="{FF2B5EF4-FFF2-40B4-BE49-F238E27FC236}">
-                <a16:creationId xmlns:a16="http://schemas.microsoft.com/office/drawing/2014/main" id="{13D8EBB4-2EE0-478E-A3A8-0C7D23598E1D}"/>
+                <a16:creationId xmlns:a16="http://schemas.microsoft.com/office/drawing/2014/main" id="{BA472489-5D53-4F97-B322-EC1754E2E784}"/>
               </a:ext>
             </a:extLst>
           </p:cNvPr>
@@ -12218,7 +12418,7 @@
           <p:cNvPr id="9" name="">
             <a:extLst xmlns:a="http://schemas.openxmlformats.org/drawingml/2006/main">
               <a:ext uri="{FF2B5EF4-FFF2-40B4-BE49-F238E27FC236}">
-                <a16:creationId xmlns:a16="http://schemas.microsoft.com/office/drawing/2014/main" id="{075C804A-D32A-4B81-8857-0128822BB938}"/>
+                <a16:creationId xmlns:a16="http://schemas.microsoft.com/office/drawing/2014/main" id="{2715B1FF-5F3F-47C4-A49A-7EC1BAC0961E}"/>
               </a:ext>
             </a:extLst>
           </p:cNvPr>
@@ -12275,7 +12475,7 @@
           <p:cNvPr id="10" name="">
             <a:extLst xmlns:a="http://schemas.openxmlformats.org/drawingml/2006/main">
               <a:ext uri="{FF2B5EF4-FFF2-40B4-BE49-F238E27FC236}">
-                <a16:creationId xmlns:a16="http://schemas.microsoft.com/office/drawing/2014/main" id="{4F76A55A-353D-4888-B9C9-8FB404BB2CDF}"/>
+                <a16:creationId xmlns:a16="http://schemas.microsoft.com/office/drawing/2014/main" id="{E0B0E856-61CF-44EF-98BE-A40A117F78F1}"/>
               </a:ext>
             </a:extLst>
           </p:cNvPr>
@@ -12309,7 +12509,7 @@
           <p:cNvPr id="11" name="">
             <a:extLst xmlns:a="http://schemas.openxmlformats.org/drawingml/2006/main">
               <a:ext uri="{FF2B5EF4-FFF2-40B4-BE49-F238E27FC236}">
-                <a16:creationId xmlns:a16="http://schemas.microsoft.com/office/drawing/2014/main" id="{17790BC4-880F-4C67-A76C-CA7120CF2FB7}"/>
+                <a16:creationId xmlns:a16="http://schemas.microsoft.com/office/drawing/2014/main" id="{2182D1AB-715D-4DEC-A8AD-154784D25FAD}"/>
               </a:ext>
             </a:extLst>
           </p:cNvPr>
@@ -12341,7 +12541,7 @@
           <p:cNvPr id="12" name="">
             <a:extLst xmlns:a="http://schemas.openxmlformats.org/drawingml/2006/main">
               <a:ext uri="{FF2B5EF4-FFF2-40B4-BE49-F238E27FC236}">
-                <a16:creationId xmlns:a16="http://schemas.microsoft.com/office/drawing/2014/main" id="{EA7B317B-15C7-41F3-BF06-345E178A01D0}"/>
+                <a16:creationId xmlns:a16="http://schemas.microsoft.com/office/drawing/2014/main" id="{DB93C14C-A4A7-4848-802C-89A4E4924B97}"/>
               </a:ext>
             </a:extLst>
           </p:cNvPr>
@@ -12398,7 +12598,7 @@
           <p:cNvPr id="13" name="">
             <a:extLst xmlns:a="http://schemas.openxmlformats.org/drawingml/2006/main">
               <a:ext uri="{FF2B5EF4-FFF2-40B4-BE49-F238E27FC236}">
-                <a16:creationId xmlns:a16="http://schemas.microsoft.com/office/drawing/2014/main" id="{D822D701-BAD6-41BD-BAD6-5070B86DE8B8}"/>
+                <a16:creationId xmlns:a16="http://schemas.microsoft.com/office/drawing/2014/main" id="{BCFD3BC8-C92D-4E4D-B436-15A0F268026E}"/>
               </a:ext>
             </a:extLst>
           </p:cNvPr>
@@ -12455,7 +12655,7 @@
           <p:cNvPr id="14" name="">
             <a:extLst xmlns:a="http://schemas.openxmlformats.org/drawingml/2006/main">
               <a:ext uri="{FF2B5EF4-FFF2-40B4-BE49-F238E27FC236}">
-                <a16:creationId xmlns:a16="http://schemas.microsoft.com/office/drawing/2014/main" id="{F2A4875E-76F1-46A6-97F9-F733A8825402}"/>
+                <a16:creationId xmlns:a16="http://schemas.microsoft.com/office/drawing/2014/main" id="{7128B968-ADDF-4191-B1F5-475E1738D0CD}"/>
               </a:ext>
             </a:extLst>
           </p:cNvPr>
@@ -12489,7 +12689,7 @@
           <p:cNvPr id="15" name="">
             <a:extLst xmlns:a="http://schemas.openxmlformats.org/drawingml/2006/main">
               <a:ext uri="{FF2B5EF4-FFF2-40B4-BE49-F238E27FC236}">
-                <a16:creationId xmlns:a16="http://schemas.microsoft.com/office/drawing/2014/main" id="{546A7861-AA1B-44FF-B96C-72D711B02476}"/>
+                <a16:creationId xmlns:a16="http://schemas.microsoft.com/office/drawing/2014/main" id="{60A150BC-51BE-4F43-8D55-EC8454275B1B}"/>
               </a:ext>
             </a:extLst>
           </p:cNvPr>
@@ -12521,7 +12721,7 @@
           <p:cNvPr id="16" name="">
             <a:extLst xmlns:a="http://schemas.openxmlformats.org/drawingml/2006/main">
               <a:ext uri="{FF2B5EF4-FFF2-40B4-BE49-F238E27FC236}">
-                <a16:creationId xmlns:a16="http://schemas.microsoft.com/office/drawing/2014/main" id="{8D39B80C-C730-4BA3-9592-83D844CE991A}"/>
+                <a16:creationId xmlns:a16="http://schemas.microsoft.com/office/drawing/2014/main" id="{C25AA850-C6D0-4D3A-91DE-CDC951923037}"/>
               </a:ext>
             </a:extLst>
           </p:cNvPr>
@@ -12578,7 +12778,7 @@
           <p:cNvPr id="17" name="">
             <a:extLst xmlns:a="http://schemas.openxmlformats.org/drawingml/2006/main">
               <a:ext uri="{FF2B5EF4-FFF2-40B4-BE49-F238E27FC236}">
-                <a16:creationId xmlns:a16="http://schemas.microsoft.com/office/drawing/2014/main" id="{3C15B99F-5AD6-4BCC-BFD3-7E122FC8061D}"/>
+                <a16:creationId xmlns:a16="http://schemas.microsoft.com/office/drawing/2014/main" id="{C9833803-D233-4421-BA5F-8839D57EB01F}"/>
               </a:ext>
             </a:extLst>
           </p:cNvPr>
@@ -12635,7 +12835,7 @@
           <p:cNvPr id="18" name="">
             <a:extLst xmlns:a="http://schemas.openxmlformats.org/drawingml/2006/main">
               <a:ext uri="{FF2B5EF4-FFF2-40B4-BE49-F238E27FC236}">
-                <a16:creationId xmlns:a16="http://schemas.microsoft.com/office/drawing/2014/main" id="{5DECECB5-A4E6-4E86-8967-F83FA4E2F6E1}"/>
+                <a16:creationId xmlns:a16="http://schemas.microsoft.com/office/drawing/2014/main" id="{911BF879-F33F-4B32-9525-C1F2E51936EE}"/>
               </a:ext>
             </a:extLst>
           </p:cNvPr>
@@ -12669,7 +12869,7 @@
           <p:cNvPr id="19" name="">
             <a:extLst xmlns:a="http://schemas.openxmlformats.org/drawingml/2006/main">
               <a:ext uri="{FF2B5EF4-FFF2-40B4-BE49-F238E27FC236}">
-                <a16:creationId xmlns:a16="http://schemas.microsoft.com/office/drawing/2014/main" id="{9170551C-97FB-49D9-A389-2BAA7558056A}"/>
+                <a16:creationId xmlns:a16="http://schemas.microsoft.com/office/drawing/2014/main" id="{D7D13B3A-8AF1-4CEA-BE21-8502FA3BBDD3}"/>
               </a:ext>
             </a:extLst>
           </p:cNvPr>
@@ -12701,7 +12901,7 @@
           <p:cNvPr id="20" name="">
             <a:extLst xmlns:a="http://schemas.openxmlformats.org/drawingml/2006/main">
               <a:ext uri="{FF2B5EF4-FFF2-40B4-BE49-F238E27FC236}">
-                <a16:creationId xmlns:a16="http://schemas.microsoft.com/office/drawing/2014/main" id="{3CD79FD1-17D2-4C64-9324-6ED1E54337BF}"/>
+                <a16:creationId xmlns:a16="http://schemas.microsoft.com/office/drawing/2014/main" id="{AC165B05-28C8-4194-8309-4017412411E7}"/>
               </a:ext>
             </a:extLst>
           </p:cNvPr>
@@ -12758,7 +12958,7 @@
           <p:cNvPr id="21" name="">
             <a:extLst xmlns:a="http://schemas.openxmlformats.org/drawingml/2006/main">
               <a:ext uri="{FF2B5EF4-FFF2-40B4-BE49-F238E27FC236}">
-                <a16:creationId xmlns:a16="http://schemas.microsoft.com/office/drawing/2014/main" id="{B66B1553-8394-4B88-9406-7BB67AFF89C1}"/>
+                <a16:creationId xmlns:a16="http://schemas.microsoft.com/office/drawing/2014/main" id="{B960BCF3-53E3-43AD-875E-C491D4F4B493}"/>
               </a:ext>
             </a:extLst>
           </p:cNvPr>
@@ -12815,7 +13015,7 @@
           <p:cNvPr id="22" name="">
             <a:extLst xmlns:a="http://schemas.openxmlformats.org/drawingml/2006/main">
               <a:ext uri="{FF2B5EF4-FFF2-40B4-BE49-F238E27FC236}">
-                <a16:creationId xmlns:a16="http://schemas.microsoft.com/office/drawing/2014/main" id="{44F15616-63A6-4329-BC14-61E970D974BB}"/>
+                <a16:creationId xmlns:a16="http://schemas.microsoft.com/office/drawing/2014/main" id="{3BEF9EF5-778F-4F4B-BCB0-1FF7E7F46952}"/>
               </a:ext>
             </a:extLst>
           </p:cNvPr>
@@ -12870,7 +13070,7 @@
     </p:spTree>
     <p:extLst>
       <p:ext uri="{BB962C8B-B14F-4D97-AF65-F5344CB8AC3E}">
-        <p14:creationId xmlns:p14="http://schemas.microsoft.com/office/powerpoint/2010/main" val="233970497"/>
+        <p14:creationId xmlns:p14="http://schemas.microsoft.com/office/powerpoint/2010/main" val="623453089"/>
       </p:ext>
     </p:extLst>
   </p:cSld>
@@ -13071,7 +13271,7 @@
           <p:cNvPr id="22" name="">
             <a:extLst xmlns:a="http://schemas.openxmlformats.org/drawingml/2006/main">
               <a:ext uri="{FF2B5EF4-FFF2-40B4-BE49-F238E27FC236}">
-                <a16:creationId xmlns:a16="http://schemas.microsoft.com/office/drawing/2014/main" id="{9675E598-7232-470E-BBA6-65B914695DEC}"/>
+                <a16:creationId xmlns:a16="http://schemas.microsoft.com/office/drawing/2014/main" id="{A123D9FE-7BD0-47A3-81F0-3BDACB3C2218}"/>
               </a:ext>
             </a:extLst>
           </p:cNvPr>
@@ -13103,7 +13303,7 @@
           <p:cNvPr id="2" name="">
             <a:extLst xmlns:a="http://schemas.openxmlformats.org/drawingml/2006/main">
               <a:ext uri="{FF2B5EF4-FFF2-40B4-BE49-F238E27FC236}">
-                <a16:creationId xmlns:a16="http://schemas.microsoft.com/office/drawing/2014/main" id="{F3101A36-2E18-4BED-9EDB-5C28E61F9B44}"/>
+                <a16:creationId xmlns:a16="http://schemas.microsoft.com/office/drawing/2014/main" id="{7205C9ED-74BE-41AE-84DC-1A00A04EF752}"/>
               </a:ext>
             </a:extLst>
           </p:cNvPr>
@@ -13160,7 +13360,7 @@
           <p:cNvPr id="3" name="">
             <a:extLst xmlns:a="http://schemas.openxmlformats.org/drawingml/2006/main">
               <a:ext uri="{FF2B5EF4-FFF2-40B4-BE49-F238E27FC236}">
-                <a16:creationId xmlns:a16="http://schemas.microsoft.com/office/drawing/2014/main" id="{86C69D2D-25D4-4170-A52D-1D8C63EAC1DB}"/>
+                <a16:creationId xmlns:a16="http://schemas.microsoft.com/office/drawing/2014/main" id="{78D98E98-2610-4780-A284-81F7C7F911ED}"/>
               </a:ext>
             </a:extLst>
           </p:cNvPr>
@@ -13192,7 +13392,7 @@
           <p:cNvPr id="4" name="">
             <a:extLst xmlns:a="http://schemas.openxmlformats.org/drawingml/2006/main">
               <a:ext uri="{FF2B5EF4-FFF2-40B4-BE49-F238E27FC236}">
-                <a16:creationId xmlns:a16="http://schemas.microsoft.com/office/drawing/2014/main" id="{2FB865AB-7E12-4AE7-BF22-3D46D2CC5D86}"/>
+                <a16:creationId xmlns:a16="http://schemas.microsoft.com/office/drawing/2014/main" id="{DA84F96B-5A22-4F37-8370-16587144D008}"/>
               </a:ext>
             </a:extLst>
           </p:cNvPr>
@@ -13249,7 +13449,7 @@
           <p:cNvPr id="5" name="">
             <a:extLst xmlns:a="http://schemas.openxmlformats.org/drawingml/2006/main">
               <a:ext uri="{FF2B5EF4-FFF2-40B4-BE49-F238E27FC236}">
-                <a16:creationId xmlns:a16="http://schemas.microsoft.com/office/drawing/2014/main" id="{0C4A6D27-36AD-493E-9D65-B5ECBD8D57F3}"/>
+                <a16:creationId xmlns:a16="http://schemas.microsoft.com/office/drawing/2014/main" id="{9049362F-AF87-4F0E-9E16-35DA66E5F4FE}"/>
               </a:ext>
             </a:extLst>
           </p:cNvPr>
@@ -13306,7 +13506,7 @@
           <p:cNvPr id="6" name="">
             <a:extLst xmlns:a="http://schemas.openxmlformats.org/drawingml/2006/main">
               <a:ext uri="{FF2B5EF4-FFF2-40B4-BE49-F238E27FC236}">
-                <a16:creationId xmlns:a16="http://schemas.microsoft.com/office/drawing/2014/main" id="{2A45526C-FC3D-4850-9348-3E2BE3D93F87}"/>
+                <a16:creationId xmlns:a16="http://schemas.microsoft.com/office/drawing/2014/main" id="{DE7EC7DC-EF51-4F61-A137-D30953938613}"/>
               </a:ext>
             </a:extLst>
           </p:cNvPr>
@@ -13363,7 +13563,7 @@
           <p:cNvPr id="7" name="">
             <a:extLst xmlns:a="http://schemas.openxmlformats.org/drawingml/2006/main">
               <a:ext uri="{FF2B5EF4-FFF2-40B4-BE49-F238E27FC236}">
-                <a16:creationId xmlns:a16="http://schemas.microsoft.com/office/drawing/2014/main" id="{3A03BDB9-8D97-4C76-B99A-9E47A197265D}"/>
+                <a16:creationId xmlns:a16="http://schemas.microsoft.com/office/drawing/2014/main" id="{E37861A4-4F23-49F1-9420-C6765E813855}"/>
               </a:ext>
             </a:extLst>
           </p:cNvPr>
@@ -13395,7 +13595,7 @@
           <p:cNvPr id="8" name="">
             <a:extLst xmlns:a="http://schemas.openxmlformats.org/drawingml/2006/main">
               <a:ext uri="{FF2B5EF4-FFF2-40B4-BE49-F238E27FC236}">
-                <a16:creationId xmlns:a16="http://schemas.microsoft.com/office/drawing/2014/main" id="{C3BE0071-716D-4A28-9453-38FC65E36179}"/>
+                <a16:creationId xmlns:a16="http://schemas.microsoft.com/office/drawing/2014/main" id="{BA65B119-4FDC-417E-86B1-F15999ED2782}"/>
               </a:ext>
             </a:extLst>
           </p:cNvPr>
@@ -13452,7 +13652,7 @@
           <p:cNvPr id="9" name="">
             <a:extLst xmlns:a="http://schemas.openxmlformats.org/drawingml/2006/main">
               <a:ext uri="{FF2B5EF4-FFF2-40B4-BE49-F238E27FC236}">
-                <a16:creationId xmlns:a16="http://schemas.microsoft.com/office/drawing/2014/main" id="{6EC74EBD-8210-4EE3-8E63-C52D430863F7}"/>
+                <a16:creationId xmlns:a16="http://schemas.microsoft.com/office/drawing/2014/main" id="{FBEE2F3B-2242-4E8C-9FAC-AE02EE1F6096}"/>
               </a:ext>
             </a:extLst>
           </p:cNvPr>
@@ -13509,7 +13709,7 @@
           <p:cNvPr id="10" name="">
             <a:extLst xmlns:a="http://schemas.openxmlformats.org/drawingml/2006/main">
               <a:ext uri="{FF2B5EF4-FFF2-40B4-BE49-F238E27FC236}">
-                <a16:creationId xmlns:a16="http://schemas.microsoft.com/office/drawing/2014/main" id="{2BADBE0B-F3E7-44F0-81E4-523808960687}"/>
+                <a16:creationId xmlns:a16="http://schemas.microsoft.com/office/drawing/2014/main" id="{EAD6FA85-3CEA-4C63-B81F-D750913B0B73}"/>
               </a:ext>
             </a:extLst>
           </p:cNvPr>
@@ -13543,7 +13743,7 @@
           <p:cNvPr id="11" name="">
             <a:extLst xmlns:a="http://schemas.openxmlformats.org/drawingml/2006/main">
               <a:ext uri="{FF2B5EF4-FFF2-40B4-BE49-F238E27FC236}">
-                <a16:creationId xmlns:a16="http://schemas.microsoft.com/office/drawing/2014/main" id="{4E8833D7-900F-456D-9A36-0681E529E393}"/>
+                <a16:creationId xmlns:a16="http://schemas.microsoft.com/office/drawing/2014/main" id="{2CA0CF60-A206-473D-99E5-31B65580B1AA}"/>
               </a:ext>
             </a:extLst>
           </p:cNvPr>
@@ -13575,7 +13775,7 @@
           <p:cNvPr id="12" name="">
             <a:extLst xmlns:a="http://schemas.openxmlformats.org/drawingml/2006/main">
               <a:ext uri="{FF2B5EF4-FFF2-40B4-BE49-F238E27FC236}">
-                <a16:creationId xmlns:a16="http://schemas.microsoft.com/office/drawing/2014/main" id="{4B0C4894-187C-47A7-92B0-ED29F8E7A26D}"/>
+                <a16:creationId xmlns:a16="http://schemas.microsoft.com/office/drawing/2014/main" id="{BD7F618F-C775-4EDB-B4EE-C7702DBF9A58}"/>
               </a:ext>
             </a:extLst>
           </p:cNvPr>
@@ -13632,7 +13832,7 @@
           <p:cNvPr id="13" name="">
             <a:extLst xmlns:a="http://schemas.openxmlformats.org/drawingml/2006/main">
               <a:ext uri="{FF2B5EF4-FFF2-40B4-BE49-F238E27FC236}">
-                <a16:creationId xmlns:a16="http://schemas.microsoft.com/office/drawing/2014/main" id="{BF02EA86-E64D-40D1-AC49-935D3CE1C949}"/>
+                <a16:creationId xmlns:a16="http://schemas.microsoft.com/office/drawing/2014/main" id="{BB7583B2-27FC-4571-8ACD-6CDE8B80F5F5}"/>
               </a:ext>
             </a:extLst>
           </p:cNvPr>
@@ -13689,7 +13889,7 @@
           <p:cNvPr id="14" name="">
             <a:extLst xmlns:a="http://schemas.openxmlformats.org/drawingml/2006/main">
               <a:ext uri="{FF2B5EF4-FFF2-40B4-BE49-F238E27FC236}">
-                <a16:creationId xmlns:a16="http://schemas.microsoft.com/office/drawing/2014/main" id="{4A2D0CC8-4C30-486D-83FF-E8EFA4EB7705}"/>
+                <a16:creationId xmlns:a16="http://schemas.microsoft.com/office/drawing/2014/main" id="{AE74F269-1813-41EE-8312-0177E23E56A2}"/>
               </a:ext>
             </a:extLst>
           </p:cNvPr>
@@ -13723,7 +13923,7 @@
           <p:cNvPr id="15" name="">
             <a:extLst xmlns:a="http://schemas.openxmlformats.org/drawingml/2006/main">
               <a:ext uri="{FF2B5EF4-FFF2-40B4-BE49-F238E27FC236}">
-                <a16:creationId xmlns:a16="http://schemas.microsoft.com/office/drawing/2014/main" id="{7E3321E4-CFAC-45C9-B1FE-D70357FD2365}"/>
+                <a16:creationId xmlns:a16="http://schemas.microsoft.com/office/drawing/2014/main" id="{98AB989B-87C9-4DB2-9125-7A78599B6120}"/>
               </a:ext>
             </a:extLst>
           </p:cNvPr>
@@ -13755,7 +13955,7 @@
           <p:cNvPr id="16" name="">
             <a:extLst xmlns:a="http://schemas.openxmlformats.org/drawingml/2006/main">
               <a:ext uri="{FF2B5EF4-FFF2-40B4-BE49-F238E27FC236}">
-                <a16:creationId xmlns:a16="http://schemas.microsoft.com/office/drawing/2014/main" id="{11D2D701-4944-4001-8751-AC7C722332E2}"/>
+                <a16:creationId xmlns:a16="http://schemas.microsoft.com/office/drawing/2014/main" id="{A599E794-670A-4368-B059-F1E8B5203C51}"/>
               </a:ext>
             </a:extLst>
           </p:cNvPr>
@@ -13812,7 +14012,7 @@
           <p:cNvPr id="17" name="">
             <a:extLst xmlns:a="http://schemas.openxmlformats.org/drawingml/2006/main">
               <a:ext uri="{FF2B5EF4-FFF2-40B4-BE49-F238E27FC236}">
-                <a16:creationId xmlns:a16="http://schemas.microsoft.com/office/drawing/2014/main" id="{82607BA5-C3BA-426D-80E3-8DDB20F8B647}"/>
+                <a16:creationId xmlns:a16="http://schemas.microsoft.com/office/drawing/2014/main" id="{E13D47EC-5A17-4A93-BE65-59E231362CE3}"/>
               </a:ext>
             </a:extLst>
           </p:cNvPr>
@@ -13869,7 +14069,7 @@
           <p:cNvPr id="18" name="">
             <a:extLst xmlns:a="http://schemas.openxmlformats.org/drawingml/2006/main">
               <a:ext uri="{FF2B5EF4-FFF2-40B4-BE49-F238E27FC236}">
-                <a16:creationId xmlns:a16="http://schemas.microsoft.com/office/drawing/2014/main" id="{96FB3B8A-5702-4DA8-94E6-5B58F8B1772C}"/>
+                <a16:creationId xmlns:a16="http://schemas.microsoft.com/office/drawing/2014/main" id="{DC3B96E3-100E-439A-A9A6-0B266F24AD48}"/>
               </a:ext>
             </a:extLst>
           </p:cNvPr>
@@ -13903,7 +14103,7 @@
           <p:cNvPr id="19" name="">
             <a:extLst xmlns:a="http://schemas.openxmlformats.org/drawingml/2006/main">
               <a:ext uri="{FF2B5EF4-FFF2-40B4-BE49-F238E27FC236}">
-                <a16:creationId xmlns:a16="http://schemas.microsoft.com/office/drawing/2014/main" id="{321FFBD4-FFEA-4115-A59E-3F6F2D5B7773}"/>
+                <a16:creationId xmlns:a16="http://schemas.microsoft.com/office/drawing/2014/main" id="{22119425-389F-4AB8-AE36-2733682381A4}"/>
               </a:ext>
             </a:extLst>
           </p:cNvPr>
@@ -13935,7 +14135,7 @@
           <p:cNvPr id="20" name="">
             <a:extLst xmlns:a="http://schemas.openxmlformats.org/drawingml/2006/main">
               <a:ext uri="{FF2B5EF4-FFF2-40B4-BE49-F238E27FC236}">
-                <a16:creationId xmlns:a16="http://schemas.microsoft.com/office/drawing/2014/main" id="{E7499061-4008-4E73-B3AC-34FEE9486902}"/>
+                <a16:creationId xmlns:a16="http://schemas.microsoft.com/office/drawing/2014/main" id="{F3F4CFE5-F149-4055-BA08-E223A281D315}"/>
               </a:ext>
             </a:extLst>
           </p:cNvPr>
@@ -13992,7 +14192,7 @@
           <p:cNvPr id="21" name="">
             <a:extLst xmlns:a="http://schemas.openxmlformats.org/drawingml/2006/main">
               <a:ext uri="{FF2B5EF4-FFF2-40B4-BE49-F238E27FC236}">
-                <a16:creationId xmlns:a16="http://schemas.microsoft.com/office/drawing/2014/main" id="{9C62D2D0-CF52-4DEC-9B4D-393C87713F78}"/>
+                <a16:creationId xmlns:a16="http://schemas.microsoft.com/office/drawing/2014/main" id="{AFFDAAD4-8ABE-4951-8DE8-ED0FF59D6648}"/>
               </a:ext>
             </a:extLst>
           </p:cNvPr>
@@ -14047,7 +14247,7 @@
     </p:spTree>
     <p:extLst>
       <p:ext uri="{BB962C8B-B14F-4D97-AF65-F5344CB8AC3E}">
-        <p14:creationId xmlns:p14="http://schemas.microsoft.com/office/powerpoint/2010/main" val="1559529723"/>
+        <p14:creationId xmlns:p14="http://schemas.microsoft.com/office/powerpoint/2010/main" val="825453102"/>
       </p:ext>
     </p:extLst>
   </p:cSld>
